--- a/LabBook_10.pptx
+++ b/LabBook_10.pptx
@@ -392,7 +392,7 @@
           <a:p>
             <a:fld id="{8438F8DC-35B0-48E6-A86E-42F1F08DD00F}" type="datetimeFigureOut">
               <a:rPr lang="es-ES" smtClean="0"/>
-              <a:t>16/02/2026</a:t>
+              <a:t>03/03/2026</a:t>
             </a:fld>
             <a:endParaRPr lang="es-ES"/>
           </a:p>
@@ -569,7 +569,7 @@
           <a:p>
             <a:fld id="{FACBDC12-F39B-4B97-8F4D-6734F9D366FF}" type="datetimeFigureOut">
               <a:rPr lang="es-ES" smtClean="0"/>
-              <a:t>16/02/2026</a:t>
+              <a:t>03/03/2026</a:t>
             </a:fld>
             <a:endParaRPr lang="es-ES"/>
           </a:p>
@@ -7938,7 +7938,7 @@
         </p:nvSpPr>
         <p:spPr>
           <a:xfrm>
-            <a:off x="2978141" y="2784355"/>
+            <a:off x="3200400" y="2911778"/>
             <a:ext cx="6235717" cy="923330"/>
           </a:xfrm>
           <a:prstGeom prst="rect">
@@ -7971,6 +7971,165 @@
             <a:r>
               <a:rPr lang="en-US" dirty="0"/>
               <a:t>Paste dB/90º neff_TE0 &amp; neff_TM0 vs R</a:t>
+            </a:r>
+          </a:p>
+        </p:txBody>
+      </p:sp>
+      <p:pic>
+        <p:nvPicPr>
+          <p:cNvPr id="5" name="Imagen 4">
+            <a:extLst>
+              <a:ext uri="{FF2B5EF4-FFF2-40B4-BE49-F238E27FC236}">
+                <a16:creationId xmlns:a16="http://schemas.microsoft.com/office/drawing/2014/main" id="{AD7907C8-6A27-1661-C069-D232C3915283}"/>
+              </a:ext>
+            </a:extLst>
+          </p:cNvPr>
+          <p:cNvPicPr>
+            <a:picLocks noChangeAspect="1"/>
+          </p:cNvPicPr>
+          <p:nvPr/>
+        </p:nvPicPr>
+        <p:blipFill>
+          <a:blip r:embed="rId6"/>
+          <a:stretch>
+            <a:fillRect/>
+          </a:stretch>
+        </p:blipFill>
+        <p:spPr>
+          <a:xfrm>
+            <a:off x="718126" y="1515088"/>
+            <a:ext cx="4234873" cy="3249355"/>
+          </a:xfrm>
+          <a:prstGeom prst="rect">
+            <a:avLst/>
+          </a:prstGeom>
+        </p:spPr>
+      </p:pic>
+      <p:pic>
+        <p:nvPicPr>
+          <p:cNvPr id="10" name="Imagen 9">
+            <a:extLst>
+              <a:ext uri="{FF2B5EF4-FFF2-40B4-BE49-F238E27FC236}">
+                <a16:creationId xmlns:a16="http://schemas.microsoft.com/office/drawing/2014/main" id="{03D0F65A-D8AC-F33D-7700-5710875E1413}"/>
+              </a:ext>
+            </a:extLst>
+          </p:cNvPr>
+          <p:cNvPicPr>
+            <a:picLocks noChangeAspect="1"/>
+          </p:cNvPicPr>
+          <p:nvPr/>
+        </p:nvPicPr>
+        <p:blipFill>
+          <a:blip r:embed="rId7"/>
+          <a:stretch>
+            <a:fillRect/>
+          </a:stretch>
+        </p:blipFill>
+        <p:spPr>
+          <a:xfrm>
+            <a:off x="6189932" y="1243627"/>
+            <a:ext cx="4234873" cy="3299430"/>
+          </a:xfrm>
+          <a:prstGeom prst="rect">
+            <a:avLst/>
+          </a:prstGeom>
+        </p:spPr>
+      </p:pic>
+      <p:sp>
+        <p:nvSpPr>
+          <p:cNvPr id="11" name="CuadroTexto 10">
+            <a:extLst>
+              <a:ext uri="{FF2B5EF4-FFF2-40B4-BE49-F238E27FC236}">
+                <a16:creationId xmlns:a16="http://schemas.microsoft.com/office/drawing/2014/main" id="{AC3A4C9A-F8AC-9BD8-BC33-202373CF7FF7}"/>
+              </a:ext>
+            </a:extLst>
+          </p:cNvPr>
+          <p:cNvSpPr txBox="1"/>
+          <p:nvPr/>
+        </p:nvSpPr>
+        <p:spPr>
+          <a:xfrm>
+            <a:off x="3048000" y="2514600"/>
+            <a:ext cx="1752600" cy="1754326"/>
+          </a:xfrm>
+          <a:prstGeom prst="rect">
+            <a:avLst/>
+          </a:prstGeom>
+          <a:noFill/>
+        </p:spPr>
+        <p:txBody>
+          <a:bodyPr wrap="square" rtlCol="0">
+            <a:spAutoFit/>
+          </a:bodyPr>
+          <a:lstStyle/>
+          <a:p>
+            <a:r>
+              <a:rPr lang="es-ES" dirty="0" err="1"/>
+              <a:t>Safe</a:t>
+            </a:r>
+            <a:r>
+              <a:rPr lang="es-ES" dirty="0"/>
+              <a:t> </a:t>
+            </a:r>
+            <a:r>
+              <a:rPr lang="es-ES" dirty="0" err="1"/>
+              <a:t>radius</a:t>
+            </a:r>
+            <a:r>
+              <a:rPr lang="es-ES" dirty="0"/>
+              <a:t> : 75 -&gt; analizando que se ve que se estabiliza el índice a partir de </a:t>
+            </a:r>
+            <a:r>
+              <a:rPr lang="es-ES" dirty="0" err="1"/>
+              <a:t>ahi</a:t>
+            </a:r>
+            <a:endParaRPr lang="es-ES" dirty="0"/>
+          </a:p>
+        </p:txBody>
+      </p:sp>
+      <p:sp>
+        <p:nvSpPr>
+          <p:cNvPr id="12" name="CuadroTexto 11">
+            <a:extLst>
+              <a:ext uri="{FF2B5EF4-FFF2-40B4-BE49-F238E27FC236}">
+                <a16:creationId xmlns:a16="http://schemas.microsoft.com/office/drawing/2014/main" id="{D584BE9C-4E02-1C5F-1A13-31EB6FE7F6CE}"/>
+              </a:ext>
+            </a:extLst>
+          </p:cNvPr>
+          <p:cNvSpPr txBox="1"/>
+          <p:nvPr/>
+        </p:nvSpPr>
+        <p:spPr>
+          <a:xfrm>
+            <a:off x="7772400" y="2209800"/>
+            <a:ext cx="2169129" cy="369332"/>
+          </a:xfrm>
+          <a:prstGeom prst="rect">
+            <a:avLst/>
+          </a:prstGeom>
+          <a:noFill/>
+        </p:spPr>
+        <p:txBody>
+          <a:bodyPr wrap="square" rtlCol="0">
+            <a:spAutoFit/>
+          </a:bodyPr>
+          <a:lstStyle/>
+          <a:p>
+            <a:r>
+              <a:rPr lang="es-ES" dirty="0" err="1"/>
+              <a:t>Safe</a:t>
+            </a:r>
+            <a:r>
+              <a:rPr lang="es-ES" dirty="0"/>
+              <a:t> </a:t>
+            </a:r>
+            <a:r>
+              <a:rPr lang="es-ES" dirty="0" err="1"/>
+              <a:t>radius</a:t>
+            </a:r>
+            <a:r>
+              <a:rPr lang="es-ES" dirty="0"/>
+              <a:t>: 50</a:t>
             </a:r>
           </a:p>
         </p:txBody>

--- a/LabBook_10.pptx
+++ b/LabBook_10.pptx
@@ -5,10 +5,10 @@
     <p:sldMasterId id="2147483648" r:id="rId1"/>
   </p:sldMasterIdLst>
   <p:notesMasterIdLst>
-    <p:notesMasterId r:id="rId9"/>
+    <p:notesMasterId r:id="rId11"/>
   </p:notesMasterIdLst>
   <p:handoutMasterIdLst>
-    <p:handoutMasterId r:id="rId10"/>
+    <p:handoutMasterId r:id="rId12"/>
   </p:handoutMasterIdLst>
   <p:sldIdLst>
     <p:sldId id="256" r:id="rId2"/>
@@ -17,7 +17,9 @@
     <p:sldId id="292" r:id="rId5"/>
     <p:sldId id="297" r:id="rId6"/>
     <p:sldId id="293" r:id="rId7"/>
-    <p:sldId id="288" r:id="rId8"/>
+    <p:sldId id="298" r:id="rId8"/>
+    <p:sldId id="299" r:id="rId9"/>
+    <p:sldId id="288" r:id="rId10"/>
   </p:sldIdLst>
   <p:sldSz cx="12192000" cy="6858000"/>
   <p:notesSz cx="12192000" cy="6858000"/>
@@ -392,7 +394,7 @@
           <a:p>
             <a:fld id="{8438F8DC-35B0-48E6-A86E-42F1F08DD00F}" type="datetimeFigureOut">
               <a:rPr lang="es-ES" smtClean="0"/>
-              <a:t>03/03/2026</a:t>
+              <a:t>05/03/2026</a:t>
             </a:fld>
             <a:endParaRPr lang="es-ES"/>
           </a:p>
@@ -569,7 +571,7 @@
           <a:p>
             <a:fld id="{FACBDC12-F39B-4B97-8F4D-6734F9D366FF}" type="datetimeFigureOut">
               <a:rPr lang="es-ES" smtClean="0"/>
-              <a:t>03/03/2026</a:t>
+              <a:t>05/03/2026</a:t>
             </a:fld>
             <a:endParaRPr lang="es-ES"/>
           </a:p>
@@ -7975,12 +7977,111 @@
           </a:p>
         </p:txBody>
       </p:sp>
+      <p:sp>
+        <p:nvSpPr>
+          <p:cNvPr id="11" name="CuadroTexto 10">
+            <a:extLst>
+              <a:ext uri="{FF2B5EF4-FFF2-40B4-BE49-F238E27FC236}">
+                <a16:creationId xmlns:a16="http://schemas.microsoft.com/office/drawing/2014/main" id="{AC3A4C9A-F8AC-9BD8-BC33-202373CF7FF7}"/>
+              </a:ext>
+            </a:extLst>
+          </p:cNvPr>
+          <p:cNvSpPr txBox="1"/>
+          <p:nvPr/>
+        </p:nvSpPr>
+        <p:spPr>
+          <a:xfrm>
+            <a:off x="4479276" y="1586669"/>
+            <a:ext cx="1752600" cy="1754326"/>
+          </a:xfrm>
+          <a:prstGeom prst="rect">
+            <a:avLst/>
+          </a:prstGeom>
+          <a:noFill/>
+        </p:spPr>
+        <p:txBody>
+          <a:bodyPr wrap="square" rtlCol="0">
+            <a:spAutoFit/>
+          </a:bodyPr>
+          <a:lstStyle/>
+          <a:p>
+            <a:r>
+              <a:rPr lang="es-ES" dirty="0" err="1"/>
+              <a:t>Safe</a:t>
+            </a:r>
+            <a:r>
+              <a:rPr lang="es-ES" dirty="0"/>
+              <a:t> </a:t>
+            </a:r>
+            <a:r>
+              <a:rPr lang="es-ES" dirty="0" err="1"/>
+              <a:t>radiu</a:t>
+            </a:r>
+            <a:r>
+              <a:rPr lang="es-ES" dirty="0"/>
+              <a:t> TE s : 75 -&gt; analizando que se ve que se estabiliza el índice a partir de </a:t>
+            </a:r>
+            <a:r>
+              <a:rPr lang="es-ES" dirty="0" err="1"/>
+              <a:t>ahi</a:t>
+            </a:r>
+            <a:endParaRPr lang="es-ES" dirty="0"/>
+          </a:p>
+        </p:txBody>
+      </p:sp>
+      <p:sp>
+        <p:nvSpPr>
+          <p:cNvPr id="12" name="CuadroTexto 11">
+            <a:extLst>
+              <a:ext uri="{FF2B5EF4-FFF2-40B4-BE49-F238E27FC236}">
+                <a16:creationId xmlns:a16="http://schemas.microsoft.com/office/drawing/2014/main" id="{D584BE9C-4E02-1C5F-1A13-31EB6FE7F6CE}"/>
+              </a:ext>
+            </a:extLst>
+          </p:cNvPr>
+          <p:cNvSpPr txBox="1"/>
+          <p:nvPr/>
+        </p:nvSpPr>
+        <p:spPr>
+          <a:xfrm>
+            <a:off x="7772400" y="2209800"/>
+            <a:ext cx="2169129" cy="369332"/>
+          </a:xfrm>
+          <a:prstGeom prst="rect">
+            <a:avLst/>
+          </a:prstGeom>
+          <a:noFill/>
+        </p:spPr>
+        <p:txBody>
+          <a:bodyPr wrap="square" rtlCol="0">
+            <a:spAutoFit/>
+          </a:bodyPr>
+          <a:lstStyle/>
+          <a:p>
+            <a:r>
+              <a:rPr lang="es-ES" dirty="0" err="1"/>
+              <a:t>Safe</a:t>
+            </a:r>
+            <a:r>
+              <a:rPr lang="es-ES" dirty="0"/>
+              <a:t> </a:t>
+            </a:r>
+            <a:r>
+              <a:rPr lang="es-ES" dirty="0" err="1"/>
+              <a:t>radius</a:t>
+            </a:r>
+            <a:r>
+              <a:rPr lang="es-ES" dirty="0"/>
+              <a:t>: 50</a:t>
+            </a:r>
+          </a:p>
+        </p:txBody>
+      </p:sp>
       <p:pic>
         <p:nvPicPr>
-          <p:cNvPr id="5" name="Imagen 4">
+          <p:cNvPr id="9" name="Imagen 8">
             <a:extLst>
               <a:ext uri="{FF2B5EF4-FFF2-40B4-BE49-F238E27FC236}">
-                <a16:creationId xmlns:a16="http://schemas.microsoft.com/office/drawing/2014/main" id="{AD7907C8-6A27-1661-C069-D232C3915283}"/>
+                <a16:creationId xmlns:a16="http://schemas.microsoft.com/office/drawing/2014/main" id="{7C5F36ED-4157-C8D0-384E-8DF8E59CD97C}"/>
               </a:ext>
             </a:extLst>
           </p:cNvPr>
@@ -7997,8 +8098,8 @@
         </p:blipFill>
         <p:spPr>
           <a:xfrm>
-            <a:off x="718126" y="1515088"/>
-            <a:ext cx="4234873" cy="3249355"/>
+            <a:off x="927127" y="1529762"/>
+            <a:ext cx="3594093" cy="2839084"/>
           </a:xfrm>
           <a:prstGeom prst="rect">
             <a:avLst/>
@@ -8007,10 +8108,10 @@
       </p:pic>
       <p:pic>
         <p:nvPicPr>
-          <p:cNvPr id="10" name="Imagen 9">
+          <p:cNvPr id="14" name="Imagen 13">
             <a:extLst>
               <a:ext uri="{FF2B5EF4-FFF2-40B4-BE49-F238E27FC236}">
-                <a16:creationId xmlns:a16="http://schemas.microsoft.com/office/drawing/2014/main" id="{03D0F65A-D8AC-F33D-7700-5710875E1413}"/>
+                <a16:creationId xmlns:a16="http://schemas.microsoft.com/office/drawing/2014/main" id="{5F318440-5FBC-93FE-71CA-D4592689E815}"/>
               </a:ext>
             </a:extLst>
           </p:cNvPr>
@@ -8027,113 +8128,44 @@
         </p:blipFill>
         <p:spPr>
           <a:xfrm>
-            <a:off x="6189932" y="1243627"/>
-            <a:ext cx="4234873" cy="3299430"/>
+            <a:off x="8382000" y="2635622"/>
+            <a:ext cx="4023957" cy="3087522"/>
           </a:xfrm>
           <a:prstGeom prst="rect">
             <a:avLst/>
           </a:prstGeom>
         </p:spPr>
       </p:pic>
-      <p:sp>
-        <p:nvSpPr>
-          <p:cNvPr id="11" name="CuadroTexto 10">
+      <p:pic>
+        <p:nvPicPr>
+          <p:cNvPr id="17" name="Imagen 16">
             <a:extLst>
               <a:ext uri="{FF2B5EF4-FFF2-40B4-BE49-F238E27FC236}">
-                <a16:creationId xmlns:a16="http://schemas.microsoft.com/office/drawing/2014/main" id="{AC3A4C9A-F8AC-9BD8-BC33-202373CF7FF7}"/>
+                <a16:creationId xmlns:a16="http://schemas.microsoft.com/office/drawing/2014/main" id="{6EE2FD55-2C96-EE36-8DD6-EBAD47C070D9}"/>
               </a:ext>
             </a:extLst>
           </p:cNvPr>
-          <p:cNvSpPr txBox="1"/>
+          <p:cNvPicPr>
+            <a:picLocks noChangeAspect="1"/>
+          </p:cNvPicPr>
           <p:nvPr/>
-        </p:nvSpPr>
-        <p:spPr>
-          <a:xfrm>
-            <a:off x="3048000" y="2514600"/>
-            <a:ext cx="1752600" cy="1754326"/>
+        </p:nvPicPr>
+        <p:blipFill>
+          <a:blip r:embed="rId8"/>
+          <a:stretch>
+            <a:fillRect/>
+          </a:stretch>
+        </p:blipFill>
+        <p:spPr>
+          <a:xfrm>
+            <a:off x="3478395" y="3640018"/>
+            <a:ext cx="3754361" cy="2520785"/>
           </a:xfrm>
           <a:prstGeom prst="rect">
             <a:avLst/>
           </a:prstGeom>
-          <a:noFill/>
-        </p:spPr>
-        <p:txBody>
-          <a:bodyPr wrap="square" rtlCol="0">
-            <a:spAutoFit/>
-          </a:bodyPr>
-          <a:lstStyle/>
-          <a:p>
-            <a:r>
-              <a:rPr lang="es-ES" dirty="0" err="1"/>
-              <a:t>Safe</a:t>
-            </a:r>
-            <a:r>
-              <a:rPr lang="es-ES" dirty="0"/>
-              <a:t> </a:t>
-            </a:r>
-            <a:r>
-              <a:rPr lang="es-ES" dirty="0" err="1"/>
-              <a:t>radius</a:t>
-            </a:r>
-            <a:r>
-              <a:rPr lang="es-ES" dirty="0"/>
-              <a:t> : 75 -&gt; analizando que se ve que se estabiliza el índice a partir de </a:t>
-            </a:r>
-            <a:r>
-              <a:rPr lang="es-ES" dirty="0" err="1"/>
-              <a:t>ahi</a:t>
-            </a:r>
-            <a:endParaRPr lang="es-ES" dirty="0"/>
-          </a:p>
-        </p:txBody>
-      </p:sp>
-      <p:sp>
-        <p:nvSpPr>
-          <p:cNvPr id="12" name="CuadroTexto 11">
-            <a:extLst>
-              <a:ext uri="{FF2B5EF4-FFF2-40B4-BE49-F238E27FC236}">
-                <a16:creationId xmlns:a16="http://schemas.microsoft.com/office/drawing/2014/main" id="{D584BE9C-4E02-1C5F-1A13-31EB6FE7F6CE}"/>
-              </a:ext>
-            </a:extLst>
-          </p:cNvPr>
-          <p:cNvSpPr txBox="1"/>
-          <p:nvPr/>
-        </p:nvSpPr>
-        <p:spPr>
-          <a:xfrm>
-            <a:off x="7772400" y="2209800"/>
-            <a:ext cx="2169129" cy="369332"/>
-          </a:xfrm>
-          <a:prstGeom prst="rect">
-            <a:avLst/>
-          </a:prstGeom>
-          <a:noFill/>
-        </p:spPr>
-        <p:txBody>
-          <a:bodyPr wrap="square" rtlCol="0">
-            <a:spAutoFit/>
-          </a:bodyPr>
-          <a:lstStyle/>
-          <a:p>
-            <a:r>
-              <a:rPr lang="es-ES" dirty="0" err="1"/>
-              <a:t>Safe</a:t>
-            </a:r>
-            <a:r>
-              <a:rPr lang="es-ES" dirty="0"/>
-              <a:t> </a:t>
-            </a:r>
-            <a:r>
-              <a:rPr lang="es-ES" dirty="0" err="1"/>
-              <a:t>radius</a:t>
-            </a:r>
-            <a:r>
-              <a:rPr lang="es-ES" dirty="0"/>
-              <a:t>: 50</a:t>
-            </a:r>
-          </a:p>
-        </p:txBody>
-      </p:sp>
+        </p:spPr>
+      </p:pic>
     </p:spTree>
     <p:extLst>
       <p:ext uri="{BB962C8B-B14F-4D97-AF65-F5344CB8AC3E}">
@@ -8166,6 +8198,304 @@
       </p:grpSpPr>
       <p:sp>
         <p:nvSpPr>
+          <p:cNvPr id="2" name="Marcador de número de diapositiva 1">
+            <a:extLst>
+              <a:ext uri="{FF2B5EF4-FFF2-40B4-BE49-F238E27FC236}">
+                <a16:creationId xmlns:a16="http://schemas.microsoft.com/office/drawing/2014/main" id="{9EBBD3C8-ECF7-96F6-561E-73501DE7A063}"/>
+              </a:ext>
+            </a:extLst>
+          </p:cNvPr>
+          <p:cNvSpPr>
+            <a:spLocks noGrp="1"/>
+          </p:cNvSpPr>
+          <p:nvPr>
+            <p:ph type="sldNum" sz="quarter" idx="7"/>
+          </p:nvPr>
+        </p:nvSpPr>
+        <p:spPr/>
+        <p:txBody>
+          <a:bodyPr/>
+          <a:lstStyle/>
+          <a:p>
+            <a:fld id="{B6F15528-21DE-4FAA-801E-634DDDAF4B2B}" type="slidenum">
+              <a:rPr lang="es-ES" smtClean="0"/>
+              <a:t>7</a:t>
+            </a:fld>
+            <a:endParaRPr lang="es-ES"/>
+          </a:p>
+        </p:txBody>
+      </p:sp>
+      <p:pic>
+        <p:nvPicPr>
+          <p:cNvPr id="4" name="Imagen 3">
+            <a:extLst>
+              <a:ext uri="{FF2B5EF4-FFF2-40B4-BE49-F238E27FC236}">
+                <a16:creationId xmlns:a16="http://schemas.microsoft.com/office/drawing/2014/main" id="{CB28C5BF-6E00-F4C8-53D4-01F47458C09B}"/>
+              </a:ext>
+            </a:extLst>
+          </p:cNvPr>
+          <p:cNvPicPr>
+            <a:picLocks noChangeAspect="1"/>
+          </p:cNvPicPr>
+          <p:nvPr/>
+        </p:nvPicPr>
+        <p:blipFill>
+          <a:blip r:embed="rId2"/>
+          <a:stretch>
+            <a:fillRect/>
+          </a:stretch>
+        </p:blipFill>
+        <p:spPr>
+          <a:xfrm>
+            <a:off x="-817154" y="39914"/>
+            <a:ext cx="6515100" cy="3581400"/>
+          </a:xfrm>
+          <a:prstGeom prst="rect">
+            <a:avLst/>
+          </a:prstGeom>
+        </p:spPr>
+      </p:pic>
+      <p:pic>
+        <p:nvPicPr>
+          <p:cNvPr id="6" name="Imagen 5">
+            <a:extLst>
+              <a:ext uri="{FF2B5EF4-FFF2-40B4-BE49-F238E27FC236}">
+                <a16:creationId xmlns:a16="http://schemas.microsoft.com/office/drawing/2014/main" id="{55823A1E-CA6E-2EDE-DB35-5535A6C195C5}"/>
+              </a:ext>
+            </a:extLst>
+          </p:cNvPr>
+          <p:cNvPicPr>
+            <a:picLocks noChangeAspect="1"/>
+          </p:cNvPicPr>
+          <p:nvPr/>
+        </p:nvPicPr>
+        <p:blipFill>
+          <a:blip r:embed="rId3"/>
+          <a:stretch>
+            <a:fillRect/>
+          </a:stretch>
+        </p:blipFill>
+        <p:spPr>
+          <a:xfrm>
+            <a:off x="5661660" y="25400"/>
+            <a:ext cx="6515100" cy="3581400"/>
+          </a:xfrm>
+          <a:prstGeom prst="rect">
+            <a:avLst/>
+          </a:prstGeom>
+        </p:spPr>
+      </p:pic>
+      <p:pic>
+        <p:nvPicPr>
+          <p:cNvPr id="8" name="Imagen 7">
+            <a:extLst>
+              <a:ext uri="{FF2B5EF4-FFF2-40B4-BE49-F238E27FC236}">
+                <a16:creationId xmlns:a16="http://schemas.microsoft.com/office/drawing/2014/main" id="{89BDA460-8559-59C5-9C2C-CBCADC71AF69}"/>
+              </a:ext>
+            </a:extLst>
+          </p:cNvPr>
+          <p:cNvPicPr>
+            <a:picLocks noChangeAspect="1"/>
+          </p:cNvPicPr>
+          <p:nvPr/>
+        </p:nvPicPr>
+        <p:blipFill>
+          <a:blip r:embed="rId4"/>
+          <a:stretch>
+            <a:fillRect/>
+          </a:stretch>
+        </p:blipFill>
+        <p:spPr>
+          <a:xfrm>
+            <a:off x="-381000" y="2163127"/>
+            <a:ext cx="7534685" cy="4386263"/>
+          </a:xfrm>
+          <a:prstGeom prst="rect">
+            <a:avLst/>
+          </a:prstGeom>
+        </p:spPr>
+      </p:pic>
+      <p:pic>
+        <p:nvPicPr>
+          <p:cNvPr id="12" name="Imagen 11">
+            <a:extLst>
+              <a:ext uri="{FF2B5EF4-FFF2-40B4-BE49-F238E27FC236}">
+                <a16:creationId xmlns:a16="http://schemas.microsoft.com/office/drawing/2014/main" id="{D3F18E53-796A-F2C5-AEC0-E10058D449E2}"/>
+              </a:ext>
+            </a:extLst>
+          </p:cNvPr>
+          <p:cNvPicPr>
+            <a:picLocks noChangeAspect="1"/>
+          </p:cNvPicPr>
+          <p:nvPr/>
+        </p:nvPicPr>
+        <p:blipFill>
+          <a:blip r:embed="rId5"/>
+          <a:stretch>
+            <a:fillRect/>
+          </a:stretch>
+        </p:blipFill>
+        <p:spPr>
+          <a:xfrm>
+            <a:off x="6442710" y="2044065"/>
+            <a:ext cx="5734050" cy="4333875"/>
+          </a:xfrm>
+          <a:prstGeom prst="rect">
+            <a:avLst/>
+          </a:prstGeom>
+        </p:spPr>
+      </p:pic>
+    </p:spTree>
+    <p:extLst>
+      <p:ext uri="{BB962C8B-B14F-4D97-AF65-F5344CB8AC3E}">
+        <p14:creationId xmlns:p14="http://schemas.microsoft.com/office/powerpoint/2010/main" val="287318575"/>
+      </p:ext>
+    </p:extLst>
+  </p:cSld>
+  <p:clrMapOvr>
+    <a:masterClrMapping/>
+  </p:clrMapOvr>
+</p:sld>
+</file>
+
+<file path=ppt/slides/slide8.xml><?xml version="1.0" encoding="utf-8"?>
+<p:sld xmlns:a="http://schemas.openxmlformats.org/drawingml/2006/main" xmlns:r="http://schemas.openxmlformats.org/officeDocument/2006/relationships" xmlns:p="http://schemas.openxmlformats.org/presentationml/2006/main">
+  <p:cSld>
+    <p:spTree>
+      <p:nvGrpSpPr>
+        <p:cNvPr id="1" name=""/>
+        <p:cNvGrpSpPr/>
+        <p:nvPr/>
+      </p:nvGrpSpPr>
+      <p:grpSpPr>
+        <a:xfrm>
+          <a:off x="0" y="0"/>
+          <a:ext cx="0" cy="0"/>
+          <a:chOff x="0" y="0"/>
+          <a:chExt cx="0" cy="0"/>
+        </a:xfrm>
+      </p:grpSpPr>
+      <p:sp>
+        <p:nvSpPr>
+          <p:cNvPr id="2" name="Marcador de número de diapositiva 1">
+            <a:extLst>
+              <a:ext uri="{FF2B5EF4-FFF2-40B4-BE49-F238E27FC236}">
+                <a16:creationId xmlns:a16="http://schemas.microsoft.com/office/drawing/2014/main" id="{F0BF7D35-2378-E60F-BB44-9F4A8B7CD7C8}"/>
+              </a:ext>
+            </a:extLst>
+          </p:cNvPr>
+          <p:cNvSpPr>
+            <a:spLocks noGrp="1"/>
+          </p:cNvSpPr>
+          <p:nvPr>
+            <p:ph type="sldNum" sz="quarter" idx="7"/>
+          </p:nvPr>
+        </p:nvSpPr>
+        <p:spPr/>
+        <p:txBody>
+          <a:bodyPr/>
+          <a:lstStyle/>
+          <a:p>
+            <a:fld id="{B6F15528-21DE-4FAA-801E-634DDDAF4B2B}" type="slidenum">
+              <a:rPr lang="es-ES" smtClean="0"/>
+              <a:t>8</a:t>
+            </a:fld>
+            <a:endParaRPr lang="es-ES"/>
+          </a:p>
+        </p:txBody>
+      </p:sp>
+      <p:pic>
+        <p:nvPicPr>
+          <p:cNvPr id="8" name="Imagen 7">
+            <a:extLst>
+              <a:ext uri="{FF2B5EF4-FFF2-40B4-BE49-F238E27FC236}">
+                <a16:creationId xmlns:a16="http://schemas.microsoft.com/office/drawing/2014/main" id="{20526EA3-AFC5-9D1D-E391-B7DA9A9D7697}"/>
+              </a:ext>
+            </a:extLst>
+          </p:cNvPr>
+          <p:cNvPicPr>
+            <a:picLocks noChangeAspect="1"/>
+          </p:cNvPicPr>
+          <p:nvPr/>
+        </p:nvPicPr>
+        <p:blipFill>
+          <a:blip r:embed="rId2"/>
+          <a:stretch>
+            <a:fillRect/>
+          </a:stretch>
+        </p:blipFill>
+        <p:spPr>
+          <a:xfrm>
+            <a:off x="6672262" y="295275"/>
+            <a:ext cx="5400675" cy="4333875"/>
+          </a:xfrm>
+          <a:prstGeom prst="rect">
+            <a:avLst/>
+          </a:prstGeom>
+        </p:spPr>
+      </p:pic>
+      <p:pic>
+        <p:nvPicPr>
+          <p:cNvPr id="10" name="Imagen 9">
+            <a:extLst>
+              <a:ext uri="{FF2B5EF4-FFF2-40B4-BE49-F238E27FC236}">
+                <a16:creationId xmlns:a16="http://schemas.microsoft.com/office/drawing/2014/main" id="{2CAC14DE-7679-F7EC-757C-C6F457DFA198}"/>
+              </a:ext>
+            </a:extLst>
+          </p:cNvPr>
+          <p:cNvPicPr>
+            <a:picLocks noChangeAspect="1"/>
+          </p:cNvPicPr>
+          <p:nvPr/>
+        </p:nvPicPr>
+        <p:blipFill>
+          <a:blip r:embed="rId3"/>
+          <a:stretch>
+            <a:fillRect/>
+          </a:stretch>
+        </p:blipFill>
+        <p:spPr>
+          <a:xfrm>
+            <a:off x="1066800" y="990600"/>
+            <a:ext cx="5179736" cy="3438525"/>
+          </a:xfrm>
+          <a:prstGeom prst="rect">
+            <a:avLst/>
+          </a:prstGeom>
+        </p:spPr>
+      </p:pic>
+    </p:spTree>
+    <p:extLst>
+      <p:ext uri="{BB962C8B-B14F-4D97-AF65-F5344CB8AC3E}">
+        <p14:creationId xmlns:p14="http://schemas.microsoft.com/office/powerpoint/2010/main" val="1141115365"/>
+      </p:ext>
+    </p:extLst>
+  </p:cSld>
+  <p:clrMapOvr>
+    <a:masterClrMapping/>
+  </p:clrMapOvr>
+</p:sld>
+</file>
+
+<file path=ppt/slides/slide9.xml><?xml version="1.0" encoding="utf-8"?>
+<p:sld xmlns:a="http://schemas.openxmlformats.org/drawingml/2006/main" xmlns:r="http://schemas.openxmlformats.org/officeDocument/2006/relationships" xmlns:p="http://schemas.openxmlformats.org/presentationml/2006/main">
+  <p:cSld>
+    <p:spTree>
+      <p:nvGrpSpPr>
+        <p:cNvPr id="1" name=""/>
+        <p:cNvGrpSpPr/>
+        <p:nvPr/>
+      </p:nvGrpSpPr>
+      <p:grpSpPr>
+        <a:xfrm>
+          <a:off x="0" y="0"/>
+          <a:ext cx="0" cy="0"/>
+          <a:chOff x="0" y="0"/>
+          <a:chExt cx="0" cy="0"/>
+        </a:xfrm>
+      </p:grpSpPr>
+      <p:sp>
+        <p:nvSpPr>
           <p:cNvPr id="3" name="object 3"/>
           <p:cNvSpPr/>
           <p:nvPr/>
@@ -8286,7 +8616,7 @@
           <a:p>
             <a:fld id="{B6F15528-21DE-4FAA-801E-634DDDAF4B2B}" type="slidenum">
               <a:rPr lang="es-ES" smtClean="0"/>
-              <a:t>7</a:t>
+              <a:t>9</a:t>
             </a:fld>
             <a:endParaRPr lang="es-ES"/>
           </a:p>

--- a/LabBook_10.pptx
+++ b/LabBook_10.pptx
@@ -394,7 +394,7 @@
           <a:p>
             <a:fld id="{8438F8DC-35B0-48E6-A86E-42F1F08DD00F}" type="datetimeFigureOut">
               <a:rPr lang="es-ES" smtClean="0"/>
-              <a:t>05/03/2026</a:t>
+              <a:t>06/03/2026</a:t>
             </a:fld>
             <a:endParaRPr lang="es-ES"/>
           </a:p>
@@ -571,7 +571,7 @@
           <a:p>
             <a:fld id="{FACBDC12-F39B-4B97-8F4D-6734F9D366FF}" type="datetimeFigureOut">
               <a:rPr lang="es-ES" smtClean="0"/>
-              <a:t>05/03/2026</a:t>
+              <a:t>06/03/2026</a:t>
             </a:fld>
             <a:endParaRPr lang="es-ES"/>
           </a:p>
@@ -4982,8 +4982,8 @@
         </p:nvSpPr>
         <p:spPr>
           <a:xfrm>
-            <a:off x="609441" y="1447800"/>
-            <a:ext cx="5486559" cy="3306028"/>
+            <a:off x="283627" y="1460746"/>
+            <a:ext cx="5812373" cy="3293082"/>
           </a:xfrm>
           <a:prstGeom prst="rect">
             <a:avLst/>
@@ -5093,8 +5093,8 @@
         </p:nvSpPr>
         <p:spPr>
           <a:xfrm>
-            <a:off x="609441" y="4860334"/>
-            <a:ext cx="11199971" cy="1384995"/>
+            <a:off x="496014" y="4859585"/>
+            <a:ext cx="11199971" cy="2031325"/>
           </a:xfrm>
           <a:prstGeom prst="rect">
             <a:avLst/>
@@ -5118,54 +5118,144 @@
           <a:p>
             <a:pPr algn="just"/>
             <a:r>
-              <a:rPr lang="en-US" sz="1200" dirty="0">
+              <a:rPr lang="en-US" sz="1400" dirty="0">
                 <a:latin typeface="Arial" panose="020B0604020202020204" pitchFamily="34" charset="0"/>
                 <a:cs typeface="Arial" panose="020B0604020202020204" pitchFamily="34" charset="0"/>
               </a:rPr>
-              <a:t>Comment results, determine above which grid value the effective index calculation does not change significantly</a:t>
+              <a:t>In the first plot, we can observe that from a grid resolution of 50 onward, the value converges and stabilizes around </a:t>
+            </a:r>
+            <a:r>
+              <a:rPr lang="en-US" sz="1400" dirty="0" err="1">
+                <a:latin typeface="Arial" panose="020B0604020202020204" pitchFamily="34" charset="0"/>
+                <a:cs typeface="Arial" panose="020B0604020202020204" pitchFamily="34" charset="0"/>
+              </a:rPr>
+              <a:t>n_eff</a:t>
+            </a:r>
+            <a:r>
+              <a:rPr lang="en-US" sz="1400" dirty="0">
+                <a:latin typeface="Arial" panose="020B0604020202020204" pitchFamily="34" charset="0"/>
+                <a:cs typeface="Arial" panose="020B0604020202020204" pitchFamily="34" charset="0"/>
+              </a:rPr>
+              <a:t> = 1.605. We could use 50 as grid resolution value. However, we can also notice that the value at </a:t>
+            </a:r>
+            <a:r>
+              <a:rPr lang="en-US" sz="1400" dirty="0" err="1">
+                <a:latin typeface="Arial" panose="020B0604020202020204" pitchFamily="34" charset="0"/>
+                <a:cs typeface="Arial" panose="020B0604020202020204" pitchFamily="34" charset="0"/>
+              </a:rPr>
+              <a:t>grid_resolution</a:t>
+            </a:r>
+            <a:r>
+              <a:rPr lang="en-US" sz="1400" dirty="0">
+                <a:latin typeface="Arial" panose="020B0604020202020204" pitchFamily="34" charset="0"/>
+                <a:cs typeface="Arial" panose="020B0604020202020204" pitchFamily="34" charset="0"/>
+              </a:rPr>
+              <a:t> = 20 is very close to the converged value. For this reason, it would be better to use 20 as grid resolution since it would reduce computational cost.</a:t>
             </a:r>
           </a:p>
           <a:p>
             <a:pPr algn="just"/>
-            <a:endParaRPr lang="en-US" sz="1200" dirty="0">
+            <a:endParaRPr lang="en-US" sz="1400" dirty="0">
               <a:latin typeface="Arial" panose="020B0604020202020204" pitchFamily="34" charset="0"/>
               <a:cs typeface="Arial" panose="020B0604020202020204" pitchFamily="34" charset="0"/>
             </a:endParaRPr>
           </a:p>
           <a:p>
             <a:pPr algn="just"/>
-            <a:endParaRPr lang="en-US" sz="1200" dirty="0">
+            <a:r>
+              <a:rPr lang="en-US" sz="1400" dirty="0">
+                <a:latin typeface="Arial" panose="020B0604020202020204" pitchFamily="34" charset="0"/>
+                <a:cs typeface="Arial" panose="020B0604020202020204" pitchFamily="34" charset="0"/>
+              </a:rPr>
+              <a:t>In the second plot, simulated at </a:t>
+            </a:r>
+            <a:r>
+              <a:rPr lang="en-US" sz="1400" dirty="0" err="1">
+                <a:latin typeface="Arial" panose="020B0604020202020204" pitchFamily="34" charset="0"/>
+                <a:cs typeface="Arial" panose="020B0604020202020204" pitchFamily="34" charset="0"/>
+              </a:rPr>
+              <a:t>grid_resolution</a:t>
+            </a:r>
+            <a:r>
+              <a:rPr lang="en-US" sz="1400" dirty="0">
+                <a:latin typeface="Arial" panose="020B0604020202020204" pitchFamily="34" charset="0"/>
+                <a:cs typeface="Arial" panose="020B0604020202020204" pitchFamily="34" charset="0"/>
+              </a:rPr>
+              <a:t> = 20, we can observe that the effective index converges around </a:t>
+            </a:r>
+            <a:r>
+              <a:rPr lang="en-US" sz="1400" dirty="0" err="1">
+                <a:latin typeface="Arial" panose="020B0604020202020204" pitchFamily="34" charset="0"/>
+                <a:cs typeface="Arial" panose="020B0604020202020204" pitchFamily="34" charset="0"/>
+              </a:rPr>
+              <a:t>n_eff</a:t>
+            </a:r>
+            <a:r>
+              <a:rPr lang="en-US" sz="1400" dirty="0">
+                <a:latin typeface="Arial" panose="020B0604020202020204" pitchFamily="34" charset="0"/>
+                <a:cs typeface="Arial" panose="020B0604020202020204" pitchFamily="34" charset="0"/>
+              </a:rPr>
+              <a:t> = 1.605 from a value of </a:t>
+            </a:r>
+            <a:r>
+              <a:rPr lang="en-US" sz="1400" dirty="0" err="1">
+                <a:latin typeface="Arial" panose="020B0604020202020204" pitchFamily="34" charset="0"/>
+                <a:cs typeface="Arial" panose="020B0604020202020204" pitchFamily="34" charset="0"/>
+              </a:rPr>
+              <a:t>max_grid_scaling</a:t>
+            </a:r>
+            <a:r>
+              <a:rPr lang="en-US" sz="1400" dirty="0">
+                <a:latin typeface="Arial" panose="020B0604020202020204" pitchFamily="34" charset="0"/>
+                <a:cs typeface="Arial" panose="020B0604020202020204" pitchFamily="34" charset="0"/>
+              </a:rPr>
+              <a:t> = 1.5 onward. </a:t>
+            </a:r>
+          </a:p>
+          <a:p>
+            <a:pPr algn="just"/>
+            <a:endParaRPr lang="en-US" sz="1400" dirty="0">
               <a:latin typeface="Arial" panose="020B0604020202020204" pitchFamily="34" charset="0"/>
               <a:cs typeface="Arial" panose="020B0604020202020204" pitchFamily="34" charset="0"/>
             </a:endParaRPr>
           </a:p>
           <a:p>
             <a:pPr algn="just"/>
-            <a:endParaRPr lang="en-US" sz="1200" dirty="0">
-              <a:latin typeface="Arial" panose="020B0604020202020204" pitchFamily="34" charset="0"/>
-              <a:cs typeface="Arial" panose="020B0604020202020204" pitchFamily="34" charset="0"/>
-            </a:endParaRPr>
-          </a:p>
-          <a:p>
-            <a:pPr algn="just"/>
-            <a:endParaRPr lang="en-US" sz="1200" dirty="0">
-              <a:latin typeface="Arial" panose="020B0604020202020204" pitchFamily="34" charset="0"/>
-              <a:cs typeface="Arial" panose="020B0604020202020204" pitchFamily="34" charset="0"/>
-            </a:endParaRPr>
-          </a:p>
-          <a:p>
-            <a:pPr algn="just"/>
-            <a:endParaRPr lang="en-US" sz="1200" dirty="0">
-              <a:latin typeface="Arial" panose="020B0604020202020204" pitchFamily="34" charset="0"/>
-              <a:cs typeface="Arial" panose="020B0604020202020204" pitchFamily="34" charset="0"/>
-            </a:endParaRPr>
-          </a:p>
-          <a:p>
-            <a:pPr algn="just"/>
-            <a:endParaRPr lang="en-US" sz="1200" dirty="0">
-              <a:latin typeface="Arial" panose="020B0604020202020204" pitchFamily="34" charset="0"/>
-              <a:cs typeface="Arial" panose="020B0604020202020204" pitchFamily="34" charset="0"/>
-            </a:endParaRPr>
+            <a:r>
+              <a:rPr lang="en-US" sz="1400" dirty="0">
+                <a:latin typeface="Arial" panose="020B0604020202020204" pitchFamily="34" charset="0"/>
+                <a:cs typeface="Arial" panose="020B0604020202020204" pitchFamily="34" charset="0"/>
+              </a:rPr>
+              <a:t>Overall, an appropriate configuration is </a:t>
+            </a:r>
+            <a:r>
+              <a:rPr lang="en-US" sz="1400" dirty="0" err="1">
+                <a:latin typeface="Arial" panose="020B0604020202020204" pitchFamily="34" charset="0"/>
+                <a:cs typeface="Arial" panose="020B0604020202020204" pitchFamily="34" charset="0"/>
+              </a:rPr>
+              <a:t>grid_resolution</a:t>
+            </a:r>
+            <a:r>
+              <a:rPr lang="en-US" sz="1400" dirty="0">
+                <a:latin typeface="Arial" panose="020B0604020202020204" pitchFamily="34" charset="0"/>
+                <a:cs typeface="Arial" panose="020B0604020202020204" pitchFamily="34" charset="0"/>
+              </a:rPr>
+              <a:t> = 20 and </a:t>
+            </a:r>
+            <a:r>
+              <a:rPr lang="en-US" sz="1400" dirty="0" err="1">
+                <a:latin typeface="Arial" panose="020B0604020202020204" pitchFamily="34" charset="0"/>
+                <a:cs typeface="Arial" panose="020B0604020202020204" pitchFamily="34" charset="0"/>
+              </a:rPr>
+              <a:t>max_grid_scaling</a:t>
+            </a:r>
+            <a:r>
+              <a:rPr lang="en-US" sz="1400" dirty="0">
+                <a:latin typeface="Arial" panose="020B0604020202020204" pitchFamily="34" charset="0"/>
+                <a:cs typeface="Arial" panose="020B0604020202020204" pitchFamily="34" charset="0"/>
+              </a:rPr>
+              <a:t> = 1.5 in order to obtain a stable effective index with a reasonable simulation time. </a:t>
+            </a:r>
           </a:p>
         </p:txBody>
       </p:sp>
@@ -5302,7 +5392,7 @@
         </p:blipFill>
         <p:spPr>
           <a:xfrm>
-            <a:off x="162527" y="1462355"/>
+            <a:off x="232652" y="1463048"/>
             <a:ext cx="5812374" cy="3161824"/>
           </a:xfrm>
           <a:prstGeom prst="rect">
@@ -5332,7 +5422,7 @@
         </p:blipFill>
         <p:spPr>
           <a:xfrm>
-            <a:off x="6070010" y="1462355"/>
+            <a:off x="6067269" y="1446191"/>
             <a:ext cx="5959857" cy="3212308"/>
           </a:xfrm>
           <a:prstGeom prst="rect">

--- a/LabBook_10.pptx
+++ b/LabBook_10.pptx
@@ -5,10 +5,10 @@
     <p:sldMasterId id="2147483648" r:id="rId1"/>
   </p:sldMasterIdLst>
   <p:notesMasterIdLst>
-    <p:notesMasterId r:id="rId11"/>
+    <p:notesMasterId r:id="rId14"/>
   </p:notesMasterIdLst>
   <p:handoutMasterIdLst>
-    <p:handoutMasterId r:id="rId12"/>
+    <p:handoutMasterId r:id="rId15"/>
   </p:handoutMasterIdLst>
   <p:sldIdLst>
     <p:sldId id="256" r:id="rId2"/>
@@ -16,10 +16,13 @@
     <p:sldId id="290" r:id="rId4"/>
     <p:sldId id="292" r:id="rId5"/>
     <p:sldId id="297" r:id="rId6"/>
-    <p:sldId id="293" r:id="rId7"/>
-    <p:sldId id="298" r:id="rId8"/>
-    <p:sldId id="299" r:id="rId9"/>
-    <p:sldId id="288" r:id="rId10"/>
+    <p:sldId id="300" r:id="rId7"/>
+    <p:sldId id="293" r:id="rId8"/>
+    <p:sldId id="303" r:id="rId9"/>
+    <p:sldId id="301" r:id="rId10"/>
+    <p:sldId id="302" r:id="rId11"/>
+    <p:sldId id="298" r:id="rId12"/>
+    <p:sldId id="288" r:id="rId13"/>
   </p:sldIdLst>
   <p:sldSz cx="12192000" cy="6858000"/>
   <p:notesSz cx="12192000" cy="6858000"/>
@@ -1146,6 +1149,114 @@
         <p:cNvPr id="1" name="">
           <a:extLst>
             <a:ext uri="{FF2B5EF4-FFF2-40B4-BE49-F238E27FC236}">
+              <a16:creationId xmlns:a16="http://schemas.microsoft.com/office/drawing/2014/main" id="{6E382929-150A-F6B5-1271-2D201A57D89C}"/>
+            </a:ext>
+          </a:extLst>
+        </p:cNvPr>
+        <p:cNvGrpSpPr/>
+        <p:nvPr/>
+      </p:nvGrpSpPr>
+      <p:grpSpPr>
+        <a:xfrm>
+          <a:off x="0" y="0"/>
+          <a:ext cx="0" cy="0"/>
+          <a:chOff x="0" y="0"/>
+          <a:chExt cx="0" cy="0"/>
+        </a:xfrm>
+      </p:grpSpPr>
+      <p:sp>
+        <p:nvSpPr>
+          <p:cNvPr id="2" name="Marcador de imagen de diapositiva 1">
+            <a:extLst>
+              <a:ext uri="{FF2B5EF4-FFF2-40B4-BE49-F238E27FC236}">
+                <a16:creationId xmlns:a16="http://schemas.microsoft.com/office/drawing/2014/main" id="{626BA7AD-A800-2B78-9D84-C03A0BE93D92}"/>
+              </a:ext>
+            </a:extLst>
+          </p:cNvPr>
+          <p:cNvSpPr>
+            <a:spLocks noGrp="1" noRot="1" noChangeAspect="1"/>
+          </p:cNvSpPr>
+          <p:nvPr>
+            <p:ph type="sldImg"/>
+          </p:nvPr>
+        </p:nvSpPr>
+        <p:spPr/>
+      </p:sp>
+      <p:sp>
+        <p:nvSpPr>
+          <p:cNvPr id="3" name="Marcador de notas 2">
+            <a:extLst>
+              <a:ext uri="{FF2B5EF4-FFF2-40B4-BE49-F238E27FC236}">
+                <a16:creationId xmlns:a16="http://schemas.microsoft.com/office/drawing/2014/main" id="{B858290C-8B6D-32D9-82C1-847D602FD85F}"/>
+              </a:ext>
+            </a:extLst>
+          </p:cNvPr>
+          <p:cNvSpPr>
+            <a:spLocks noGrp="1"/>
+          </p:cNvSpPr>
+          <p:nvPr>
+            <p:ph type="body" idx="1"/>
+          </p:nvPr>
+        </p:nvSpPr>
+        <p:spPr/>
+        <p:txBody>
+          <a:bodyPr/>
+          <a:lstStyle/>
+          <a:p>
+            <a:endParaRPr lang="es-ES" dirty="0"/>
+          </a:p>
+        </p:txBody>
+      </p:sp>
+      <p:sp>
+        <p:nvSpPr>
+          <p:cNvPr id="4" name="Marcador de número de diapositiva 3">
+            <a:extLst>
+              <a:ext uri="{FF2B5EF4-FFF2-40B4-BE49-F238E27FC236}">
+                <a16:creationId xmlns:a16="http://schemas.microsoft.com/office/drawing/2014/main" id="{969B786E-D589-A90F-C82B-20BC1BF1984A}"/>
+              </a:ext>
+            </a:extLst>
+          </p:cNvPr>
+          <p:cNvSpPr>
+            <a:spLocks noGrp="1"/>
+          </p:cNvSpPr>
+          <p:nvPr>
+            <p:ph type="sldNum" sz="quarter" idx="5"/>
+          </p:nvPr>
+        </p:nvSpPr>
+        <p:spPr/>
+        <p:txBody>
+          <a:bodyPr/>
+          <a:lstStyle/>
+          <a:p>
+            <a:fld id="{676223B9-C868-4436-87D9-1A3152E1157A}" type="slidenum">
+              <a:rPr lang="es-ES" smtClean="0"/>
+              <a:t>6</a:t>
+            </a:fld>
+            <a:endParaRPr lang="es-ES"/>
+          </a:p>
+        </p:txBody>
+      </p:sp>
+    </p:spTree>
+    <p:extLst>
+      <p:ext uri="{BB962C8B-B14F-4D97-AF65-F5344CB8AC3E}">
+        <p14:creationId xmlns:p14="http://schemas.microsoft.com/office/powerpoint/2010/main" val="3110443674"/>
+      </p:ext>
+    </p:extLst>
+  </p:cSld>
+  <p:clrMapOvr>
+    <a:masterClrMapping/>
+  </p:clrMapOvr>
+</p:notes>
+</file>
+
+<file path=ppt/notesSlides/notesSlide5.xml><?xml version="1.0" encoding="utf-8"?>
+<p:notes xmlns:a="http://schemas.openxmlformats.org/drawingml/2006/main" xmlns:r="http://schemas.openxmlformats.org/officeDocument/2006/relationships" xmlns:p="http://schemas.openxmlformats.org/presentationml/2006/main">
+  <p:cSld>
+    <p:spTree>
+      <p:nvGrpSpPr>
+        <p:cNvPr id="1" name="">
+          <a:extLst>
+            <a:ext uri="{FF2B5EF4-FFF2-40B4-BE49-F238E27FC236}">
               <a16:creationId xmlns:a16="http://schemas.microsoft.com/office/drawing/2014/main" id="{7B023B86-D15F-9CD8-C5EA-3EAAD8BACCF7}"/>
             </a:ext>
           </a:extLst>
@@ -1227,7 +1338,7 @@
           <a:p>
             <a:fld id="{676223B9-C868-4436-87D9-1A3152E1157A}" type="slidenum">
               <a:rPr lang="es-ES" smtClean="0"/>
-              <a:t>6</a:t>
+              <a:t>7</a:t>
             </a:fld>
             <a:endParaRPr lang="es-ES"/>
           </a:p>
@@ -1237,6 +1348,114 @@
     <p:extLst>
       <p:ext uri="{BB962C8B-B14F-4D97-AF65-F5344CB8AC3E}">
         <p14:creationId xmlns:p14="http://schemas.microsoft.com/office/powerpoint/2010/main" val="2917382716"/>
+      </p:ext>
+    </p:extLst>
+  </p:cSld>
+  <p:clrMapOvr>
+    <a:masterClrMapping/>
+  </p:clrMapOvr>
+</p:notes>
+</file>
+
+<file path=ppt/notesSlides/notesSlide6.xml><?xml version="1.0" encoding="utf-8"?>
+<p:notes xmlns:a="http://schemas.openxmlformats.org/drawingml/2006/main" xmlns:r="http://schemas.openxmlformats.org/officeDocument/2006/relationships" xmlns:p="http://schemas.openxmlformats.org/presentationml/2006/main">
+  <p:cSld>
+    <p:spTree>
+      <p:nvGrpSpPr>
+        <p:cNvPr id="1" name="">
+          <a:extLst>
+            <a:ext uri="{FF2B5EF4-FFF2-40B4-BE49-F238E27FC236}">
+              <a16:creationId xmlns:a16="http://schemas.microsoft.com/office/drawing/2014/main" id="{B3B2EBEF-C857-F457-FED8-5A874FC83395}"/>
+            </a:ext>
+          </a:extLst>
+        </p:cNvPr>
+        <p:cNvGrpSpPr/>
+        <p:nvPr/>
+      </p:nvGrpSpPr>
+      <p:grpSpPr>
+        <a:xfrm>
+          <a:off x="0" y="0"/>
+          <a:ext cx="0" cy="0"/>
+          <a:chOff x="0" y="0"/>
+          <a:chExt cx="0" cy="0"/>
+        </a:xfrm>
+      </p:grpSpPr>
+      <p:sp>
+        <p:nvSpPr>
+          <p:cNvPr id="2" name="Marcador de imagen de diapositiva 1">
+            <a:extLst>
+              <a:ext uri="{FF2B5EF4-FFF2-40B4-BE49-F238E27FC236}">
+                <a16:creationId xmlns:a16="http://schemas.microsoft.com/office/drawing/2014/main" id="{E7A139A0-C2CC-DFD6-929E-A6984A94B537}"/>
+              </a:ext>
+            </a:extLst>
+          </p:cNvPr>
+          <p:cNvSpPr>
+            <a:spLocks noGrp="1" noRot="1" noChangeAspect="1"/>
+          </p:cNvSpPr>
+          <p:nvPr>
+            <p:ph type="sldImg"/>
+          </p:nvPr>
+        </p:nvSpPr>
+        <p:spPr/>
+      </p:sp>
+      <p:sp>
+        <p:nvSpPr>
+          <p:cNvPr id="3" name="Marcador de notas 2">
+            <a:extLst>
+              <a:ext uri="{FF2B5EF4-FFF2-40B4-BE49-F238E27FC236}">
+                <a16:creationId xmlns:a16="http://schemas.microsoft.com/office/drawing/2014/main" id="{A12A8A0A-0A30-CF25-FDFF-4558A93BB0F0}"/>
+              </a:ext>
+            </a:extLst>
+          </p:cNvPr>
+          <p:cNvSpPr>
+            <a:spLocks noGrp="1"/>
+          </p:cNvSpPr>
+          <p:nvPr>
+            <p:ph type="body" idx="1"/>
+          </p:nvPr>
+        </p:nvSpPr>
+        <p:spPr/>
+        <p:txBody>
+          <a:bodyPr/>
+          <a:lstStyle/>
+          <a:p>
+            <a:endParaRPr lang="es-ES" dirty="0"/>
+          </a:p>
+        </p:txBody>
+      </p:sp>
+      <p:sp>
+        <p:nvSpPr>
+          <p:cNvPr id="4" name="Marcador de número de diapositiva 3">
+            <a:extLst>
+              <a:ext uri="{FF2B5EF4-FFF2-40B4-BE49-F238E27FC236}">
+                <a16:creationId xmlns:a16="http://schemas.microsoft.com/office/drawing/2014/main" id="{A8A459BF-7344-497E-E4C0-0A0FEBE7416F}"/>
+              </a:ext>
+            </a:extLst>
+          </p:cNvPr>
+          <p:cNvSpPr>
+            <a:spLocks noGrp="1"/>
+          </p:cNvSpPr>
+          <p:nvPr>
+            <p:ph type="sldNum" sz="quarter" idx="5"/>
+          </p:nvPr>
+        </p:nvSpPr>
+        <p:spPr/>
+        <p:txBody>
+          <a:bodyPr/>
+          <a:lstStyle/>
+          <a:p>
+            <a:fld id="{676223B9-C868-4436-87D9-1A3152E1157A}" type="slidenum">
+              <a:rPr lang="es-ES" smtClean="0"/>
+              <a:t>8</a:t>
+            </a:fld>
+            <a:endParaRPr lang="es-ES"/>
+          </a:p>
+        </p:txBody>
+      </p:sp>
+    </p:spTree>
+    <p:extLst>
+      <p:ext uri="{BB962C8B-B14F-4D97-AF65-F5344CB8AC3E}">
+        <p14:creationId xmlns:p14="http://schemas.microsoft.com/office/powerpoint/2010/main" val="2378890339"/>
       </p:ext>
     </p:extLst>
   </p:cSld>
@@ -2838,6 +3057,716 @@
 </p:sld>
 </file>
 
+<file path=ppt/slides/slide10.xml><?xml version="1.0" encoding="utf-8"?>
+<p:sld xmlns:a="http://schemas.openxmlformats.org/drawingml/2006/main" xmlns:r="http://schemas.openxmlformats.org/officeDocument/2006/relationships" xmlns:p="http://schemas.openxmlformats.org/presentationml/2006/main">
+  <p:cSld>
+    <p:spTree>
+      <p:nvGrpSpPr>
+        <p:cNvPr id="1" name="">
+          <a:extLst>
+            <a:ext uri="{FF2B5EF4-FFF2-40B4-BE49-F238E27FC236}">
+              <a16:creationId xmlns:a16="http://schemas.microsoft.com/office/drawing/2014/main" id="{D53837D1-12F7-01CA-9DA7-2842F3B4A04C}"/>
+            </a:ext>
+          </a:extLst>
+        </p:cNvPr>
+        <p:cNvGrpSpPr/>
+        <p:nvPr/>
+      </p:nvGrpSpPr>
+      <p:grpSpPr>
+        <a:xfrm>
+          <a:off x="0" y="0"/>
+          <a:ext cx="0" cy="0"/>
+          <a:chOff x="0" y="0"/>
+          <a:chExt cx="0" cy="0"/>
+        </a:xfrm>
+      </p:grpSpPr>
+      <p:sp>
+        <p:nvSpPr>
+          <p:cNvPr id="2" name="Marcador de número de diapositiva 1">
+            <a:extLst>
+              <a:ext uri="{FF2B5EF4-FFF2-40B4-BE49-F238E27FC236}">
+                <a16:creationId xmlns:a16="http://schemas.microsoft.com/office/drawing/2014/main" id="{12350782-70C4-D419-8A1B-A6DDB641BE1B}"/>
+              </a:ext>
+            </a:extLst>
+          </p:cNvPr>
+          <p:cNvSpPr>
+            <a:spLocks noGrp="1"/>
+          </p:cNvSpPr>
+          <p:nvPr>
+            <p:ph type="sldNum" sz="quarter" idx="7"/>
+          </p:nvPr>
+        </p:nvSpPr>
+        <p:spPr/>
+        <p:txBody>
+          <a:bodyPr/>
+          <a:lstStyle/>
+          <a:p>
+            <a:fld id="{B6F15528-21DE-4FAA-801E-634DDDAF4B2B}" type="slidenum">
+              <a:rPr lang="es-ES" smtClean="0"/>
+              <a:t>10</a:t>
+            </a:fld>
+            <a:endParaRPr lang="es-ES"/>
+          </a:p>
+        </p:txBody>
+      </p:sp>
+      <p:sp>
+        <p:nvSpPr>
+          <p:cNvPr id="4" name="CuadroTexto 3">
+            <a:extLst>
+              <a:ext uri="{FF2B5EF4-FFF2-40B4-BE49-F238E27FC236}">
+                <a16:creationId xmlns:a16="http://schemas.microsoft.com/office/drawing/2014/main" id="{1592049D-E9CE-C1F6-BE64-EF8FA4BB059F}"/>
+              </a:ext>
+            </a:extLst>
+          </p:cNvPr>
+          <p:cNvSpPr txBox="1"/>
+          <p:nvPr/>
+        </p:nvSpPr>
+        <p:spPr>
+          <a:xfrm>
+            <a:off x="599607" y="290626"/>
+            <a:ext cx="7620000" cy="477054"/>
+          </a:xfrm>
+          <a:prstGeom prst="rect">
+            <a:avLst/>
+          </a:prstGeom>
+          <a:noFill/>
+        </p:spPr>
+        <p:txBody>
+          <a:bodyPr wrap="square">
+            <a:spAutoFit/>
+          </a:bodyPr>
+          <a:lstStyle/>
+          <a:p>
+            <a:r>
+              <a:rPr lang="en-US" sz="2400" b="1" dirty="0"/>
+              <a:t>EXTRA (SOI) : Learning outcome #2 – Width dependence</a:t>
+            </a:r>
+            <a:endParaRPr lang="es-ES" sz="2400" b="1" dirty="0"/>
+          </a:p>
+        </p:txBody>
+      </p:sp>
+      <p:sp>
+        <p:nvSpPr>
+          <p:cNvPr id="8" name="CuadroTexto 7">
+            <a:extLst>
+              <a:ext uri="{FF2B5EF4-FFF2-40B4-BE49-F238E27FC236}">
+                <a16:creationId xmlns:a16="http://schemas.microsoft.com/office/drawing/2014/main" id="{0FC2E401-A741-2669-FFB9-4D1E834F2E96}"/>
+              </a:ext>
+            </a:extLst>
+          </p:cNvPr>
+          <p:cNvSpPr txBox="1"/>
+          <p:nvPr/>
+        </p:nvSpPr>
+        <p:spPr>
+          <a:xfrm>
+            <a:off x="609600" y="4484826"/>
+            <a:ext cx="11199971" cy="1138773"/>
+          </a:xfrm>
+          <a:prstGeom prst="rect">
+            <a:avLst/>
+          </a:prstGeom>
+          <a:solidFill>
+            <a:schemeClr val="bg1">
+              <a:lumMod val="95000"/>
+            </a:schemeClr>
+          </a:solidFill>
+          <a:ln w="28575">
+            <a:solidFill>
+              <a:srgbClr val="E0700D"/>
+            </a:solidFill>
+          </a:ln>
+        </p:spPr>
+        <p:txBody>
+          <a:bodyPr wrap="square" rtlCol="0">
+            <a:spAutoFit/>
+          </a:bodyPr>
+          <a:lstStyle/>
+          <a:p>
+            <a:pPr algn="just"/>
+            <a:r>
+              <a:rPr lang="en-US" dirty="0">
+                <a:latin typeface="Arial" panose="020B0604020202020204" pitchFamily="34" charset="0"/>
+                <a:cs typeface="Arial" panose="020B0604020202020204" pitchFamily="34" charset="0"/>
+              </a:rPr>
+              <a:t>Compared to the </a:t>
+            </a:r>
+            <a:r>
+              <a:rPr lang="en-US" dirty="0" err="1">
+                <a:latin typeface="Arial" panose="020B0604020202020204" pitchFamily="34" charset="0"/>
+                <a:cs typeface="Arial" panose="020B0604020202020204" pitchFamily="34" charset="0"/>
+              </a:rPr>
+              <a:t>SiN</a:t>
+            </a:r>
+            <a:r>
+              <a:rPr lang="en-US" dirty="0">
+                <a:latin typeface="Arial" panose="020B0604020202020204" pitchFamily="34" charset="0"/>
+                <a:cs typeface="Arial" panose="020B0604020202020204" pitchFamily="34" charset="0"/>
+              </a:rPr>
+              <a:t> case, the SOI width sweeps show the same tendency: every mode increases its effective index as width grows. However, the transition from cut-off to guided for higher order modes is more abrupt. As in </a:t>
+            </a:r>
+            <a:r>
+              <a:rPr lang="en-US" dirty="0" err="1">
+                <a:latin typeface="Arial" panose="020B0604020202020204" pitchFamily="34" charset="0"/>
+                <a:cs typeface="Arial" panose="020B0604020202020204" pitchFamily="34" charset="0"/>
+              </a:rPr>
+              <a:t>SiN</a:t>
+            </a:r>
+            <a:r>
+              <a:rPr lang="en-US" dirty="0">
+                <a:latin typeface="Arial" panose="020B0604020202020204" pitchFamily="34" charset="0"/>
+                <a:cs typeface="Arial" panose="020B0604020202020204" pitchFamily="34" charset="0"/>
+              </a:rPr>
+              <a:t>, the fundamental TE mode remains the most sensitive to width. </a:t>
+            </a:r>
+          </a:p>
+          <a:p>
+            <a:pPr algn="just"/>
+            <a:endParaRPr lang="en-US" sz="1400" dirty="0">
+              <a:latin typeface="Arial" panose="020B0604020202020204" pitchFamily="34" charset="0"/>
+              <a:cs typeface="Arial" panose="020B0604020202020204" pitchFamily="34" charset="0"/>
+            </a:endParaRPr>
+          </a:p>
+        </p:txBody>
+      </p:sp>
+      <p:pic>
+        <p:nvPicPr>
+          <p:cNvPr id="3" name="Imagen 2">
+            <a:extLst>
+              <a:ext uri="{FF2B5EF4-FFF2-40B4-BE49-F238E27FC236}">
+                <a16:creationId xmlns:a16="http://schemas.microsoft.com/office/drawing/2014/main" id="{0C45BECD-021B-6B8A-7EFB-57535E889CD2}"/>
+              </a:ext>
+            </a:extLst>
+          </p:cNvPr>
+          <p:cNvPicPr>
+            <a:picLocks noChangeAspect="1"/>
+          </p:cNvPicPr>
+          <p:nvPr/>
+        </p:nvPicPr>
+        <p:blipFill>
+          <a:blip r:embed="rId2"/>
+          <a:stretch>
+            <a:fillRect/>
+          </a:stretch>
+        </p:blipFill>
+        <p:spPr>
+          <a:xfrm>
+            <a:off x="1600200" y="865866"/>
+            <a:ext cx="5923498" cy="3448322"/>
+          </a:xfrm>
+          <a:prstGeom prst="rect">
+            <a:avLst/>
+          </a:prstGeom>
+        </p:spPr>
+      </p:pic>
+      <p:pic>
+        <p:nvPicPr>
+          <p:cNvPr id="7" name="Imagen 6">
+            <a:extLst>
+              <a:ext uri="{FF2B5EF4-FFF2-40B4-BE49-F238E27FC236}">
+                <a16:creationId xmlns:a16="http://schemas.microsoft.com/office/drawing/2014/main" id="{A91656BB-3B50-A357-E93E-B26E96E2856D}"/>
+              </a:ext>
+            </a:extLst>
+          </p:cNvPr>
+          <p:cNvPicPr>
+            <a:picLocks noChangeAspect="1"/>
+          </p:cNvPicPr>
+          <p:nvPr/>
+        </p:nvPicPr>
+        <p:blipFill>
+          <a:blip r:embed="rId3"/>
+          <a:stretch>
+            <a:fillRect/>
+          </a:stretch>
+        </p:blipFill>
+        <p:spPr>
+          <a:xfrm>
+            <a:off x="7696200" y="1600200"/>
+            <a:ext cx="3931766" cy="2288850"/>
+          </a:xfrm>
+          <a:prstGeom prst="rect">
+            <a:avLst/>
+          </a:prstGeom>
+        </p:spPr>
+      </p:pic>
+    </p:spTree>
+    <p:extLst>
+      <p:ext uri="{BB962C8B-B14F-4D97-AF65-F5344CB8AC3E}">
+        <p14:creationId xmlns:p14="http://schemas.microsoft.com/office/powerpoint/2010/main" val="495616637"/>
+      </p:ext>
+    </p:extLst>
+  </p:cSld>
+  <p:clrMapOvr>
+    <a:masterClrMapping/>
+  </p:clrMapOvr>
+</p:sld>
+</file>
+
+<file path=ppt/slides/slide11.xml><?xml version="1.0" encoding="utf-8"?>
+<p:sld xmlns:a="http://schemas.openxmlformats.org/drawingml/2006/main" xmlns:r="http://schemas.openxmlformats.org/officeDocument/2006/relationships" xmlns:p="http://schemas.openxmlformats.org/presentationml/2006/main">
+  <p:cSld>
+    <p:spTree>
+      <p:nvGrpSpPr>
+        <p:cNvPr id="1" name=""/>
+        <p:cNvGrpSpPr/>
+        <p:nvPr/>
+      </p:nvGrpSpPr>
+      <p:grpSpPr>
+        <a:xfrm>
+          <a:off x="0" y="0"/>
+          <a:ext cx="0" cy="0"/>
+          <a:chOff x="0" y="0"/>
+          <a:chExt cx="0" cy="0"/>
+        </a:xfrm>
+      </p:grpSpPr>
+      <p:pic>
+        <p:nvPicPr>
+          <p:cNvPr id="5" name="Imagen 4">
+            <a:extLst>
+              <a:ext uri="{FF2B5EF4-FFF2-40B4-BE49-F238E27FC236}">
+                <a16:creationId xmlns:a16="http://schemas.microsoft.com/office/drawing/2014/main" id="{20526EA3-AFC5-9D1D-E391-B7DA9A9D7697}"/>
+              </a:ext>
+            </a:extLst>
+          </p:cNvPr>
+          <p:cNvPicPr>
+            <a:picLocks noChangeAspect="1"/>
+          </p:cNvPicPr>
+          <p:nvPr/>
+        </p:nvPicPr>
+        <p:blipFill>
+          <a:blip r:embed="rId2"/>
+          <a:stretch>
+            <a:fillRect/>
+          </a:stretch>
+        </p:blipFill>
+        <p:spPr>
+          <a:xfrm>
+            <a:off x="239844" y="626652"/>
+            <a:ext cx="4126572" cy="3311447"/>
+          </a:xfrm>
+          <a:prstGeom prst="rect">
+            <a:avLst/>
+          </a:prstGeom>
+        </p:spPr>
+      </p:pic>
+      <p:sp>
+        <p:nvSpPr>
+          <p:cNvPr id="2" name="Marcador de número de diapositiva 1">
+            <a:extLst>
+              <a:ext uri="{FF2B5EF4-FFF2-40B4-BE49-F238E27FC236}">
+                <a16:creationId xmlns:a16="http://schemas.microsoft.com/office/drawing/2014/main" id="{9EBBD3C8-ECF7-96F6-561E-73501DE7A063}"/>
+              </a:ext>
+            </a:extLst>
+          </p:cNvPr>
+          <p:cNvSpPr>
+            <a:spLocks noGrp="1"/>
+          </p:cNvSpPr>
+          <p:nvPr>
+            <p:ph type="sldNum" sz="quarter" idx="7"/>
+          </p:nvPr>
+        </p:nvSpPr>
+        <p:spPr/>
+        <p:txBody>
+          <a:bodyPr/>
+          <a:lstStyle/>
+          <a:p>
+            <a:fld id="{B6F15528-21DE-4FAA-801E-634DDDAF4B2B}" type="slidenum">
+              <a:rPr lang="es-ES" smtClean="0"/>
+              <a:t>11</a:t>
+            </a:fld>
+            <a:endParaRPr lang="es-ES"/>
+          </a:p>
+        </p:txBody>
+      </p:sp>
+      <p:pic>
+        <p:nvPicPr>
+          <p:cNvPr id="12" name="Imagen 11">
+            <a:extLst>
+              <a:ext uri="{FF2B5EF4-FFF2-40B4-BE49-F238E27FC236}">
+                <a16:creationId xmlns:a16="http://schemas.microsoft.com/office/drawing/2014/main" id="{D3F18E53-796A-F2C5-AEC0-E10058D449E2}"/>
+              </a:ext>
+            </a:extLst>
+          </p:cNvPr>
+          <p:cNvPicPr>
+            <a:picLocks noChangeAspect="1"/>
+          </p:cNvPicPr>
+          <p:nvPr/>
+        </p:nvPicPr>
+        <p:blipFill>
+          <a:blip r:embed="rId3"/>
+          <a:stretch>
+            <a:fillRect/>
+          </a:stretch>
+        </p:blipFill>
+        <p:spPr>
+          <a:xfrm>
+            <a:off x="4453860" y="739779"/>
+            <a:ext cx="4126572" cy="3118920"/>
+          </a:xfrm>
+          <a:prstGeom prst="rect">
+            <a:avLst/>
+          </a:prstGeom>
+        </p:spPr>
+      </p:pic>
+      <p:pic>
+        <p:nvPicPr>
+          <p:cNvPr id="10" name="Imagen 9">
+            <a:extLst>
+              <a:ext uri="{FF2B5EF4-FFF2-40B4-BE49-F238E27FC236}">
+                <a16:creationId xmlns:a16="http://schemas.microsoft.com/office/drawing/2014/main" id="{2CAC14DE-7679-F7EC-757C-C6F457DFA198}"/>
+              </a:ext>
+            </a:extLst>
+          </p:cNvPr>
+          <p:cNvPicPr>
+            <a:picLocks noChangeAspect="1"/>
+          </p:cNvPicPr>
+          <p:nvPr/>
+        </p:nvPicPr>
+        <p:blipFill>
+          <a:blip r:embed="rId4"/>
+          <a:stretch>
+            <a:fillRect/>
+          </a:stretch>
+        </p:blipFill>
+        <p:spPr>
+          <a:xfrm>
+            <a:off x="2484667" y="3810000"/>
+            <a:ext cx="4384841" cy="2910840"/>
+          </a:xfrm>
+          <a:prstGeom prst="rect">
+            <a:avLst/>
+          </a:prstGeom>
+        </p:spPr>
+      </p:pic>
+      <p:sp>
+        <p:nvSpPr>
+          <p:cNvPr id="9" name="CuadroTexto 8">
+            <a:extLst>
+              <a:ext uri="{FF2B5EF4-FFF2-40B4-BE49-F238E27FC236}">
+                <a16:creationId xmlns:a16="http://schemas.microsoft.com/office/drawing/2014/main" id="{99E5F00B-128C-564F-FBBB-B6BCA8DC6757}"/>
+              </a:ext>
+            </a:extLst>
+          </p:cNvPr>
+          <p:cNvSpPr txBox="1"/>
+          <p:nvPr/>
+        </p:nvSpPr>
+        <p:spPr>
+          <a:xfrm>
+            <a:off x="152400" y="137160"/>
+            <a:ext cx="11506200" cy="523220"/>
+          </a:xfrm>
+          <a:prstGeom prst="rect">
+            <a:avLst/>
+          </a:prstGeom>
+          <a:noFill/>
+        </p:spPr>
+        <p:txBody>
+          <a:bodyPr wrap="square">
+            <a:spAutoFit/>
+          </a:bodyPr>
+          <a:lstStyle/>
+          <a:p>
+            <a:r>
+              <a:rPr lang="en-US" sz="2800" b="1" dirty="0"/>
+              <a:t>EXTRA (SOI) : Learning outcome #4 – Bend waveguide radius vs. loss – deep</a:t>
+            </a:r>
+            <a:endParaRPr lang="es-ES" sz="2800" b="1" dirty="0"/>
+          </a:p>
+        </p:txBody>
+      </p:sp>
+      <p:sp>
+        <p:nvSpPr>
+          <p:cNvPr id="11" name="CuadroTexto 10">
+            <a:extLst>
+              <a:ext uri="{FF2B5EF4-FFF2-40B4-BE49-F238E27FC236}">
+                <a16:creationId xmlns:a16="http://schemas.microsoft.com/office/drawing/2014/main" id="{CD4DE00D-A2B0-D0CC-8005-DD96271C8CA5}"/>
+              </a:ext>
+            </a:extLst>
+          </p:cNvPr>
+          <p:cNvSpPr txBox="1"/>
+          <p:nvPr/>
+        </p:nvSpPr>
+        <p:spPr>
+          <a:xfrm>
+            <a:off x="8915400" y="1219200"/>
+            <a:ext cx="2804160" cy="1200329"/>
+          </a:xfrm>
+          <a:prstGeom prst="rect">
+            <a:avLst/>
+          </a:prstGeom>
+          <a:noFill/>
+        </p:spPr>
+        <p:txBody>
+          <a:bodyPr wrap="square" rtlCol="0">
+            <a:spAutoFit/>
+          </a:bodyPr>
+          <a:lstStyle/>
+          <a:p>
+            <a:r>
+              <a:rPr lang="es-ES" dirty="0" err="1"/>
+              <a:t>Safe</a:t>
+            </a:r>
+            <a:r>
+              <a:rPr lang="es-ES" dirty="0"/>
+              <a:t> </a:t>
+            </a:r>
+            <a:r>
+              <a:rPr lang="es-ES" dirty="0" err="1"/>
+              <a:t>bend</a:t>
+            </a:r>
+            <a:r>
+              <a:rPr lang="es-ES" dirty="0"/>
+              <a:t> </a:t>
+            </a:r>
+            <a:r>
+              <a:rPr lang="es-ES" dirty="0" err="1"/>
+              <a:t>radius</a:t>
+            </a:r>
+            <a:r>
+              <a:rPr lang="es-ES" dirty="0"/>
+              <a:t> for SOI:</a:t>
+            </a:r>
+          </a:p>
+          <a:p>
+            <a:r>
+              <a:rPr lang="es-ES" dirty="0">
+                <a:latin typeface="Segoe UI" panose="020B0502040204020203" pitchFamily="34" charset="0"/>
+              </a:rPr>
+              <a:t>10 µm</a:t>
+            </a:r>
+          </a:p>
+          <a:p>
+            <a:r>
+              <a:rPr lang="es-ES" dirty="0"/>
+              <a:t> </a:t>
+            </a:r>
+          </a:p>
+          <a:p>
+            <a:endParaRPr lang="es-ES" dirty="0"/>
+          </a:p>
+        </p:txBody>
+      </p:sp>
+      <p:sp>
+        <p:nvSpPr>
+          <p:cNvPr id="15" name="CuadroTexto 14">
+            <a:extLst>
+              <a:ext uri="{FF2B5EF4-FFF2-40B4-BE49-F238E27FC236}">
+                <a16:creationId xmlns:a16="http://schemas.microsoft.com/office/drawing/2014/main" id="{163E121A-EC9F-B1CB-F8AC-EC486C0A7FE5}"/>
+              </a:ext>
+            </a:extLst>
+          </p:cNvPr>
+          <p:cNvSpPr txBox="1"/>
+          <p:nvPr/>
+        </p:nvSpPr>
+        <p:spPr>
+          <a:xfrm>
+            <a:off x="7434808" y="4135517"/>
+            <a:ext cx="3766592" cy="1754326"/>
+          </a:xfrm>
+          <a:prstGeom prst="rect">
+            <a:avLst/>
+          </a:prstGeom>
+          <a:noFill/>
+        </p:spPr>
+        <p:txBody>
+          <a:bodyPr wrap="square" rtlCol="0">
+            <a:spAutoFit/>
+          </a:bodyPr>
+          <a:lstStyle/>
+          <a:p>
+            <a:pPr algn="just"/>
+            <a:r>
+              <a:rPr lang="en-US" dirty="0">
+                <a:latin typeface="Arial" panose="020B0604020202020204" pitchFamily="34" charset="0"/>
+                <a:cs typeface="Arial" panose="020B0604020202020204" pitchFamily="34" charset="0"/>
+              </a:rPr>
+              <a:t>In SOI the loss minimum appears near 10 µm, while in </a:t>
+            </a:r>
+            <a:r>
+              <a:rPr lang="en-US" dirty="0" err="1">
+                <a:latin typeface="Arial" panose="020B0604020202020204" pitchFamily="34" charset="0"/>
+                <a:cs typeface="Arial" panose="020B0604020202020204" pitchFamily="34" charset="0"/>
+              </a:rPr>
+              <a:t>SiN</a:t>
+            </a:r>
+            <a:r>
+              <a:rPr lang="en-US" dirty="0">
+                <a:latin typeface="Arial" panose="020B0604020202020204" pitchFamily="34" charset="0"/>
+                <a:cs typeface="Arial" panose="020B0604020202020204" pitchFamily="34" charset="0"/>
+              </a:rPr>
+              <a:t> it only stabilizes near 75 µm, reflecting how much more compact SOI bends can be. </a:t>
+            </a:r>
+          </a:p>
+          <a:p>
+            <a:endParaRPr lang="es-ES" dirty="0"/>
+          </a:p>
+        </p:txBody>
+      </p:sp>
+    </p:spTree>
+    <p:extLst>
+      <p:ext uri="{BB962C8B-B14F-4D97-AF65-F5344CB8AC3E}">
+        <p14:creationId xmlns:p14="http://schemas.microsoft.com/office/powerpoint/2010/main" val="287318575"/>
+      </p:ext>
+    </p:extLst>
+  </p:cSld>
+  <p:clrMapOvr>
+    <a:masterClrMapping/>
+  </p:clrMapOvr>
+</p:sld>
+</file>
+
+<file path=ppt/slides/slide12.xml><?xml version="1.0" encoding="utf-8"?>
+<p:sld xmlns:a="http://schemas.openxmlformats.org/drawingml/2006/main" xmlns:r="http://schemas.openxmlformats.org/officeDocument/2006/relationships" xmlns:p="http://schemas.openxmlformats.org/presentationml/2006/main">
+  <p:cSld>
+    <p:spTree>
+      <p:nvGrpSpPr>
+        <p:cNvPr id="1" name=""/>
+        <p:cNvGrpSpPr/>
+        <p:nvPr/>
+      </p:nvGrpSpPr>
+      <p:grpSpPr>
+        <a:xfrm>
+          <a:off x="0" y="0"/>
+          <a:ext cx="0" cy="0"/>
+          <a:chOff x="0" y="0"/>
+          <a:chExt cx="0" cy="0"/>
+        </a:xfrm>
+      </p:grpSpPr>
+      <p:sp>
+        <p:nvSpPr>
+          <p:cNvPr id="3" name="object 3"/>
+          <p:cNvSpPr/>
+          <p:nvPr/>
+        </p:nvSpPr>
+        <p:spPr>
+          <a:xfrm>
+            <a:off x="3945635" y="2636520"/>
+            <a:ext cx="8246363" cy="1584959"/>
+          </a:xfrm>
+          <a:prstGeom prst="rect">
+            <a:avLst/>
+          </a:prstGeom>
+          <a:blipFill>
+            <a:blip r:embed="rId2" cstate="print"/>
+            <a:stretch>
+              <a:fillRect/>
+            </a:stretch>
+          </a:blipFill>
+        </p:spPr>
+        <p:txBody>
+          <a:bodyPr wrap="square" lIns="0" tIns="0" rIns="0" bIns="0" rtlCol="0"/>
+          <a:lstStyle/>
+          <a:p>
+            <a:endParaRPr/>
+          </a:p>
+        </p:txBody>
+      </p:sp>
+      <p:sp>
+        <p:nvSpPr>
+          <p:cNvPr id="4" name="object 4"/>
+          <p:cNvSpPr txBox="1">
+            <a:spLocks noGrp="1"/>
+          </p:cNvSpPr>
+          <p:nvPr>
+            <p:ph type="title"/>
+          </p:nvPr>
+        </p:nvSpPr>
+        <p:spPr>
+          <a:xfrm>
+            <a:off x="4513326" y="3165729"/>
+            <a:ext cx="2233295" cy="513715"/>
+          </a:xfrm>
+          <a:prstGeom prst="rect">
+            <a:avLst/>
+          </a:prstGeom>
+        </p:spPr>
+        <p:txBody>
+          <a:bodyPr vert="horz" wrap="square" lIns="0" tIns="13335" rIns="0" bIns="0" rtlCol="0">
+            <a:spAutoFit/>
+          </a:bodyPr>
+          <a:lstStyle/>
+          <a:p>
+            <a:pPr marL="12700">
+              <a:lnSpc>
+                <a:spcPct val="100000"/>
+              </a:lnSpc>
+              <a:spcBef>
+                <a:spcPts val="105"/>
+              </a:spcBef>
+            </a:pPr>
+            <a:r>
+              <a:rPr sz="3200" b="1" spc="-5" dirty="0">
+                <a:solidFill>
+                  <a:srgbClr val="FFFFFF"/>
+                </a:solidFill>
+                <a:latin typeface="Lucida Sans"/>
+                <a:cs typeface="Lucida Sans"/>
+              </a:rPr>
+              <a:t>Thank</a:t>
+            </a:r>
+            <a:r>
+              <a:rPr sz="3200" b="1" spc="-55" dirty="0">
+                <a:solidFill>
+                  <a:srgbClr val="FFFFFF"/>
+                </a:solidFill>
+                <a:latin typeface="Lucida Sans"/>
+                <a:cs typeface="Lucida Sans"/>
+              </a:rPr>
+              <a:t> </a:t>
+            </a:r>
+            <a:r>
+              <a:rPr sz="3200" b="1" dirty="0">
+                <a:solidFill>
+                  <a:srgbClr val="FFFFFF"/>
+                </a:solidFill>
+                <a:latin typeface="Lucida Sans"/>
+                <a:cs typeface="Lucida Sans"/>
+              </a:rPr>
+              <a:t>you</a:t>
+            </a:r>
+            <a:endParaRPr sz="3200">
+              <a:latin typeface="Lucida Sans"/>
+              <a:cs typeface="Lucida Sans"/>
+            </a:endParaRPr>
+          </a:p>
+        </p:txBody>
+      </p:sp>
+      <p:sp>
+        <p:nvSpPr>
+          <p:cNvPr id="5" name="Marcador de número de diapositiva 4">
+            <a:extLst>
+              <a:ext uri="{FF2B5EF4-FFF2-40B4-BE49-F238E27FC236}">
+                <a16:creationId xmlns:a16="http://schemas.microsoft.com/office/drawing/2014/main" id="{B052DA19-AD24-7D24-2AE9-51F8F5A7F5E0}"/>
+              </a:ext>
+            </a:extLst>
+          </p:cNvPr>
+          <p:cNvSpPr>
+            <a:spLocks noGrp="1"/>
+          </p:cNvSpPr>
+          <p:nvPr>
+            <p:ph type="sldNum" sz="quarter" idx="7"/>
+          </p:nvPr>
+        </p:nvSpPr>
+        <p:spPr/>
+        <p:txBody>
+          <a:bodyPr/>
+          <a:lstStyle/>
+          <a:p>
+            <a:fld id="{B6F15528-21DE-4FAA-801E-634DDDAF4B2B}" type="slidenum">
+              <a:rPr lang="es-ES" smtClean="0"/>
+              <a:t>12</a:t>
+            </a:fld>
+            <a:endParaRPr lang="es-ES"/>
+          </a:p>
+        </p:txBody>
+      </p:sp>
+    </p:spTree>
+  </p:cSld>
+  <p:clrMapOvr>
+    <a:masterClrMapping/>
+  </p:clrMapOvr>
+</p:sld>
+</file>
+
 <file path=ppt/slides/slide2.xml><?xml version="1.0" encoding="utf-8"?>
 <p:sld xmlns:a="http://schemas.openxmlformats.org/drawingml/2006/main" xmlns:r="http://schemas.openxmlformats.org/officeDocument/2006/relationships" xmlns:p="http://schemas.openxmlformats.org/presentationml/2006/main">
   <p:cSld>
@@ -4970,58 +5899,6 @@
       </p:sp>
       <p:sp>
         <p:nvSpPr>
-          <p:cNvPr id="6" name="Rectángulo 5">
-            <a:extLst>
-              <a:ext uri="{FF2B5EF4-FFF2-40B4-BE49-F238E27FC236}">
-                <a16:creationId xmlns:a16="http://schemas.microsoft.com/office/drawing/2014/main" id="{067C6D40-33EE-D9BE-7F58-8D96221D0D59}"/>
-              </a:ext>
-            </a:extLst>
-          </p:cNvPr>
-          <p:cNvSpPr/>
-          <p:nvPr/>
-        </p:nvSpPr>
-        <p:spPr>
-          <a:xfrm>
-            <a:off x="283627" y="1460746"/>
-            <a:ext cx="5812373" cy="3293082"/>
-          </a:xfrm>
-          <a:prstGeom prst="rect">
-            <a:avLst/>
-          </a:prstGeom>
-          <a:noFill/>
-          <a:ln w="28575">
-            <a:solidFill>
-              <a:srgbClr val="E0700D"/>
-            </a:solidFill>
-          </a:ln>
-        </p:spPr>
-        <p:style>
-          <a:lnRef idx="2">
-            <a:schemeClr val="accent1">
-              <a:shade val="15000"/>
-            </a:schemeClr>
-          </a:lnRef>
-          <a:fillRef idx="1">
-            <a:schemeClr val="accent1"/>
-          </a:fillRef>
-          <a:effectRef idx="0">
-            <a:schemeClr val="accent1"/>
-          </a:effectRef>
-          <a:fontRef idx="minor">
-            <a:schemeClr val="lt1"/>
-          </a:fontRef>
-        </p:style>
-        <p:txBody>
-          <a:bodyPr rtlCol="0" anchor="ctr"/>
-          <a:lstStyle/>
-          <a:p>
-            <a:pPr algn="ctr"/>
-            <a:endParaRPr lang="en-US"/>
-          </a:p>
-        </p:txBody>
-      </p:sp>
-      <p:sp>
-        <p:nvSpPr>
           <p:cNvPr id="8" name="CuadroTexto 7">
             <a:extLst>
               <a:ext uri="{FF2B5EF4-FFF2-40B4-BE49-F238E27FC236}">
@@ -5093,7 +5970,7 @@
         </p:nvSpPr>
         <p:spPr>
           <a:xfrm>
-            <a:off x="496014" y="4859585"/>
+            <a:off x="583019" y="4572734"/>
             <a:ext cx="11199971" cy="2031325"/>
           </a:xfrm>
           <a:prstGeom prst="rect">
@@ -5122,7 +5999,7 @@
                 <a:latin typeface="Arial" panose="020B0604020202020204" pitchFamily="34" charset="0"/>
                 <a:cs typeface="Arial" panose="020B0604020202020204" pitchFamily="34" charset="0"/>
               </a:rPr>
-              <a:t>In the first plot, we can observe that from a grid resolution of 50 onward, the value converges and stabilizes around </a:t>
+              <a:t>In the first plot, we observe that from a grid resolution of 50 onward, the value converges and stabilizes around </a:t>
             </a:r>
             <a:r>
               <a:rPr lang="en-US" sz="1400" dirty="0" err="1">
@@ -5150,7 +6027,7 @@
                 <a:latin typeface="Arial" panose="020B0604020202020204" pitchFamily="34" charset="0"/>
                 <a:cs typeface="Arial" panose="020B0604020202020204" pitchFamily="34" charset="0"/>
               </a:rPr>
-              <a:t> = 20 is very close to the converged value. For this reason, it would be better to use 20 as grid resolution since it would reduce computational cost.</a:t>
+              <a:t> = 20 is very close to the converged value. For this reason, it would be preferable to use 20 as grid resolution, since it reduces computational cost.</a:t>
             </a:r>
           </a:p>
           <a:p>
@@ -5167,7 +6044,7 @@
                 <a:latin typeface="Arial" panose="020B0604020202020204" pitchFamily="34" charset="0"/>
                 <a:cs typeface="Arial" panose="020B0604020202020204" pitchFamily="34" charset="0"/>
               </a:rPr>
-              <a:t>In the second plot, simulated at </a:t>
+              <a:t>In the second plot, simulated with </a:t>
             </a:r>
             <a:r>
               <a:rPr lang="en-US" sz="1400" dirty="0" err="1">
@@ -5181,7 +6058,7 @@
                 <a:latin typeface="Arial" panose="020B0604020202020204" pitchFamily="34" charset="0"/>
                 <a:cs typeface="Arial" panose="020B0604020202020204" pitchFamily="34" charset="0"/>
               </a:rPr>
-              <a:t> = 20, we can observe that the effective index converges around </a:t>
+              <a:t> = 20, we observe that the effective index converges around </a:t>
             </a:r>
             <a:r>
               <a:rPr lang="en-US" sz="1400" dirty="0" err="1">
@@ -5256,58 +6133,6 @@
               </a:rPr>
               <a:t> = 1.5 in order to obtain a stable effective index with a reasonable simulation time. </a:t>
             </a:r>
-          </a:p>
-        </p:txBody>
-      </p:sp>
-      <p:sp>
-        <p:nvSpPr>
-          <p:cNvPr id="2" name="Rectángulo 1">
-            <a:extLst>
-              <a:ext uri="{FF2B5EF4-FFF2-40B4-BE49-F238E27FC236}">
-                <a16:creationId xmlns:a16="http://schemas.microsoft.com/office/drawing/2014/main" id="{029F2FF9-FEB4-7AA3-B3B4-EFA9CFA0E230}"/>
-              </a:ext>
-            </a:extLst>
-          </p:cNvPr>
-          <p:cNvSpPr/>
-          <p:nvPr/>
-        </p:nvSpPr>
-        <p:spPr>
-          <a:xfrm>
-            <a:off x="6322853" y="1447800"/>
-            <a:ext cx="5486559" cy="3306028"/>
-          </a:xfrm>
-          <a:prstGeom prst="rect">
-            <a:avLst/>
-          </a:prstGeom>
-          <a:noFill/>
-          <a:ln w="28575">
-            <a:solidFill>
-              <a:srgbClr val="E0700D"/>
-            </a:solidFill>
-          </a:ln>
-        </p:spPr>
-        <p:style>
-          <a:lnRef idx="2">
-            <a:schemeClr val="accent1">
-              <a:shade val="15000"/>
-            </a:schemeClr>
-          </a:lnRef>
-          <a:fillRef idx="1">
-            <a:schemeClr val="accent1"/>
-          </a:fillRef>
-          <a:effectRef idx="0">
-            <a:schemeClr val="accent1"/>
-          </a:effectRef>
-          <a:fontRef idx="minor">
-            <a:schemeClr val="lt1"/>
-          </a:fontRef>
-        </p:style>
-        <p:txBody>
-          <a:bodyPr rtlCol="0" anchor="ctr"/>
-          <a:lstStyle/>
-          <a:p>
-            <a:pPr algn="ctr"/>
-            <a:endParaRPr lang="en-US"/>
           </a:p>
         </p:txBody>
       </p:sp>
@@ -5392,7 +6217,7 @@
         </p:blipFill>
         <p:spPr>
           <a:xfrm>
-            <a:off x="232652" y="1463048"/>
+            <a:off x="337667" y="1234903"/>
             <a:ext cx="5812374" cy="3161824"/>
           </a:xfrm>
           <a:prstGeom prst="rect">
@@ -5422,7 +6247,7 @@
         </p:blipFill>
         <p:spPr>
           <a:xfrm>
-            <a:off x="6067269" y="1446191"/>
+            <a:off x="6032420" y="1209661"/>
             <a:ext cx="5959857" cy="3212308"/>
           </a:xfrm>
           <a:prstGeom prst="rect">
@@ -5639,7 +6464,7 @@
         <p:spPr>
           <a:xfrm>
             <a:off x="609441" y="4860334"/>
-            <a:ext cx="11199971" cy="1200329"/>
+            <a:ext cx="11199971" cy="1077218"/>
           </a:xfrm>
           <a:prstGeom prst="rect">
             <a:avLst/>
@@ -5663,62 +6488,17 @@
           <a:p>
             <a:pPr algn="just"/>
             <a:r>
-              <a:rPr lang="en-US" sz="1200" dirty="0">
+              <a:rPr lang="en-US" sz="1600" dirty="0">
                 <a:latin typeface="Arial" panose="020B0604020202020204" pitchFamily="34" charset="0"/>
                 <a:cs typeface="Arial" panose="020B0604020202020204" pitchFamily="34" charset="0"/>
               </a:rPr>
-              <a:t>Comment results (neff changes this way with width, polarization behavior, </a:t>
-            </a:r>
-            <a:r>
-              <a:rPr lang="en-US" sz="1200" dirty="0" err="1">
-                <a:latin typeface="Arial" panose="020B0604020202020204" pitchFamily="34" charset="0"/>
-                <a:cs typeface="Arial" panose="020B0604020202020204" pitchFamily="34" charset="0"/>
-              </a:rPr>
-              <a:t>etc</a:t>
-            </a:r>
-            <a:r>
-              <a:rPr lang="en-US" sz="1200" dirty="0">
-                <a:latin typeface="Arial" panose="020B0604020202020204" pitchFamily="34" charset="0"/>
-                <a:cs typeface="Arial" panose="020B0604020202020204" pitchFamily="34" charset="0"/>
-              </a:rPr>
-              <a:t>…)</a:t>
-            </a:r>
-          </a:p>
-          <a:p>
-            <a:pPr algn="just"/>
+              <a:t>The plot shows that the effective index of all guided modes increases as the waveguide width grows. The fundamental TE mode (Mode 0) exhibits the highest sensitivity to width variations (it interacts with the side walls). As the width increases, Mode 2 becomes guided. If a higher width were simulated, Mode 3 would also be guided. Moreover, the slopes of Mode 2 and 3 also increase with width. </a:t>
+            </a:r>
             <a:endParaRPr lang="en-US" sz="1200" dirty="0">
               <a:latin typeface="Arial" panose="020B0604020202020204" pitchFamily="34" charset="0"/>
               <a:cs typeface="Arial" panose="020B0604020202020204" pitchFamily="34" charset="0"/>
             </a:endParaRPr>
           </a:p>
-          <a:p>
-            <a:pPr algn="just"/>
-            <a:endParaRPr lang="en-US" sz="1200" dirty="0">
-              <a:latin typeface="Arial" panose="020B0604020202020204" pitchFamily="34" charset="0"/>
-              <a:cs typeface="Arial" panose="020B0604020202020204" pitchFamily="34" charset="0"/>
-            </a:endParaRPr>
-          </a:p>
-          <a:p>
-            <a:pPr algn="just"/>
-            <a:endParaRPr lang="en-US" sz="1200" dirty="0">
-              <a:latin typeface="Arial" panose="020B0604020202020204" pitchFamily="34" charset="0"/>
-              <a:cs typeface="Arial" panose="020B0604020202020204" pitchFamily="34" charset="0"/>
-            </a:endParaRPr>
-          </a:p>
-          <a:p>
-            <a:pPr algn="just"/>
-            <a:endParaRPr lang="en-US" sz="1200" dirty="0">
-              <a:latin typeface="Arial" panose="020B0604020202020204" pitchFamily="34" charset="0"/>
-              <a:cs typeface="Arial" panose="020B0604020202020204" pitchFamily="34" charset="0"/>
-            </a:endParaRPr>
-          </a:p>
-          <a:p>
-            <a:pPr algn="just"/>
-            <a:endParaRPr lang="en-US" sz="1200" dirty="0">
-              <a:latin typeface="Arial" panose="020B0604020202020204" pitchFamily="34" charset="0"/>
-              <a:cs typeface="Arial" panose="020B0604020202020204" pitchFamily="34" charset="0"/>
-            </a:endParaRPr>
-          </a:p>
         </p:txBody>
       </p:sp>
       <p:sp>
@@ -5735,8 +6515,8 @@
         </p:nvSpPr>
         <p:spPr>
           <a:xfrm>
-            <a:off x="609441" y="1418373"/>
-            <a:ext cx="11199971" cy="3306028"/>
+            <a:off x="609441" y="1114204"/>
+            <a:ext cx="11199971" cy="3610197"/>
           </a:xfrm>
           <a:prstGeom prst="rect">
             <a:avLst/>
@@ -5846,8 +6626,8 @@
         </p:blipFill>
         <p:spPr>
           <a:xfrm>
-            <a:off x="3352800" y="1352464"/>
-            <a:ext cx="5905500" cy="3437845"/>
+            <a:off x="3048000" y="1140150"/>
+            <a:ext cx="6050040" cy="3521988"/>
           </a:xfrm>
           <a:prstGeom prst="rect">
             <a:avLst/>
@@ -6882,58 +7662,6 @@
       </mc:AlternateContent>
       <p:sp>
         <p:nvSpPr>
-          <p:cNvPr id="5" name="Rectángulo 4">
-            <a:extLst>
-              <a:ext uri="{FF2B5EF4-FFF2-40B4-BE49-F238E27FC236}">
-                <a16:creationId xmlns:a16="http://schemas.microsoft.com/office/drawing/2014/main" id="{A6B92C76-6772-2E00-346F-532321092C04}"/>
-              </a:ext>
-            </a:extLst>
-          </p:cNvPr>
-          <p:cNvSpPr/>
-          <p:nvPr/>
-        </p:nvSpPr>
-        <p:spPr>
-          <a:xfrm>
-            <a:off x="609441" y="1447800"/>
-            <a:ext cx="5486559" cy="3306028"/>
-          </a:xfrm>
-          <a:prstGeom prst="rect">
-            <a:avLst/>
-          </a:prstGeom>
-          <a:noFill/>
-          <a:ln w="28575">
-            <a:solidFill>
-              <a:srgbClr val="E0700D"/>
-            </a:solidFill>
-          </a:ln>
-        </p:spPr>
-        <p:style>
-          <a:lnRef idx="2">
-            <a:schemeClr val="accent1">
-              <a:shade val="15000"/>
-            </a:schemeClr>
-          </a:lnRef>
-          <a:fillRef idx="1">
-            <a:schemeClr val="accent1"/>
-          </a:fillRef>
-          <a:effectRef idx="0">
-            <a:schemeClr val="accent1"/>
-          </a:effectRef>
-          <a:fontRef idx="minor">
-            <a:schemeClr val="lt1"/>
-          </a:fontRef>
-        </p:style>
-        <p:txBody>
-          <a:bodyPr rtlCol="0" anchor="ctr"/>
-          <a:lstStyle/>
-          <a:p>
-            <a:pPr algn="ctr"/>
-            <a:endParaRPr lang="en-US"/>
-          </a:p>
-        </p:txBody>
-      </p:sp>
-      <p:sp>
-        <p:nvSpPr>
           <p:cNvPr id="6" name="Rectángulo 5">
             <a:extLst>
               <a:ext uri="{FF2B5EF4-FFF2-40B4-BE49-F238E27FC236}">
@@ -7347,7 +8075,7 @@
         </p:blipFill>
         <p:spPr>
           <a:xfrm>
-            <a:off x="5910262" y="1411368"/>
+            <a:off x="5837811" y="1395198"/>
             <a:ext cx="6205538" cy="3411231"/>
           </a:xfrm>
           <a:prstGeom prst="rect">
@@ -7377,68 +8105,8 @@
         </p:blipFill>
         <p:spPr>
           <a:xfrm>
-            <a:off x="204060" y="1421304"/>
-            <a:ext cx="5734671" cy="3152392"/>
-          </a:xfrm>
-          <a:prstGeom prst="rect">
-            <a:avLst/>
-          </a:prstGeom>
-        </p:spPr>
-      </p:pic>
-      <p:pic>
-        <p:nvPicPr>
-          <p:cNvPr id="14" name="Imagen 13" descr="Texto&#10;&#10;El contenido generado por IA puede ser incorrecto.">
-            <a:extLst>
-              <a:ext uri="{FF2B5EF4-FFF2-40B4-BE49-F238E27FC236}">
-                <a16:creationId xmlns:a16="http://schemas.microsoft.com/office/drawing/2014/main" id="{EEEE56E1-E96D-FA9B-236F-706EBBC5D90A}"/>
-              </a:ext>
-            </a:extLst>
-          </p:cNvPr>
-          <p:cNvPicPr>
-            <a:picLocks noChangeAspect="1"/>
-          </p:cNvPicPr>
-          <p:nvPr/>
-        </p:nvPicPr>
-        <p:blipFill>
-          <a:blip r:embed="rId11"/>
-          <a:stretch>
-            <a:fillRect/>
-          </a:stretch>
-        </p:blipFill>
-        <p:spPr>
-          <a:xfrm>
-            <a:off x="555793" y="2450296"/>
-            <a:ext cx="5448300" cy="3619500"/>
-          </a:xfrm>
-          <a:prstGeom prst="rect">
-            <a:avLst/>
-          </a:prstGeom>
-        </p:spPr>
-      </p:pic>
-      <p:pic>
-        <p:nvPicPr>
-          <p:cNvPr id="17" name="Imagen 16" descr="Texto&#10;&#10;El contenido generado por IA puede ser incorrecto.">
-            <a:extLst>
-              <a:ext uri="{FF2B5EF4-FFF2-40B4-BE49-F238E27FC236}">
-                <a16:creationId xmlns:a16="http://schemas.microsoft.com/office/drawing/2014/main" id="{AA956FA2-AD7C-EFF5-F77A-91C4C8730156}"/>
-              </a:ext>
-            </a:extLst>
-          </p:cNvPr>
-          <p:cNvPicPr>
-            <a:picLocks noChangeAspect="1"/>
-          </p:cNvPicPr>
-          <p:nvPr/>
-        </p:nvPicPr>
-        <p:blipFill>
-          <a:blip r:embed="rId12"/>
-          <a:stretch>
-            <a:fillRect/>
-          </a:stretch>
-        </p:blipFill>
-        <p:spPr>
-          <a:xfrm>
-            <a:off x="6290464" y="2168683"/>
-            <a:ext cx="6000750" cy="3705225"/>
+            <a:off x="132412" y="1422795"/>
+            <a:ext cx="5764881" cy="3168999"/>
           </a:xfrm>
           <a:prstGeom prst="rect">
             <a:avLst/>
@@ -7466,6 +8134,647 @@
         <p:cNvPr id="1" name="">
           <a:extLst>
             <a:ext uri="{FF2B5EF4-FFF2-40B4-BE49-F238E27FC236}">
+              <a16:creationId xmlns:a16="http://schemas.microsoft.com/office/drawing/2014/main" id="{027C8A0C-A23A-025D-42B1-09ED97DBD942}"/>
+            </a:ext>
+          </a:extLst>
+        </p:cNvPr>
+        <p:cNvGrpSpPr/>
+        <p:nvPr/>
+      </p:nvGrpSpPr>
+      <p:grpSpPr>
+        <a:xfrm>
+          <a:off x="0" y="0"/>
+          <a:ext cx="0" cy="0"/>
+          <a:chOff x="0" y="0"/>
+          <a:chExt cx="0" cy="0"/>
+        </a:xfrm>
+      </p:grpSpPr>
+      <p:sp>
+        <p:nvSpPr>
+          <p:cNvPr id="16" name="object 16">
+            <a:extLst>
+              <a:ext uri="{FF2B5EF4-FFF2-40B4-BE49-F238E27FC236}">
+                <a16:creationId xmlns:a16="http://schemas.microsoft.com/office/drawing/2014/main" id="{EEE48914-29CC-A065-D265-6EF6AAFD07EB}"/>
+              </a:ext>
+            </a:extLst>
+          </p:cNvPr>
+          <p:cNvSpPr txBox="1">
+            <a:spLocks noGrp="1"/>
+          </p:cNvSpPr>
+          <p:nvPr>
+            <p:ph type="title"/>
+          </p:nvPr>
+        </p:nvSpPr>
+        <p:spPr>
+          <a:xfrm>
+            <a:off x="685800" y="408883"/>
+            <a:ext cx="10994410" cy="1090042"/>
+          </a:xfrm>
+          <a:prstGeom prst="rect">
+            <a:avLst/>
+          </a:prstGeom>
+        </p:spPr>
+        <p:txBody>
+          <a:bodyPr vert="horz" wrap="square" lIns="0" tIns="12700" rIns="0" bIns="0" rtlCol="0">
+            <a:spAutoFit/>
+          </a:bodyPr>
+          <a:lstStyle/>
+          <a:p>
+            <a:pPr marL="12700">
+              <a:lnSpc>
+                <a:spcPct val="100000"/>
+              </a:lnSpc>
+              <a:spcBef>
+                <a:spcPts val="100"/>
+              </a:spcBef>
+            </a:pPr>
+            <a:r>
+              <a:rPr lang="en-US" sz="2500" dirty="0"/>
+              <a:t>Learning outcome #3 – Waveguide compact model</a:t>
+            </a:r>
+            <a:br>
+              <a:rPr lang="en-US" sz="2500" spc="-5" dirty="0">
+                <a:latin typeface="+mj-lt"/>
+                <a:cs typeface="Lucida Sans"/>
+              </a:rPr>
+            </a:br>
+            <a:br>
+              <a:rPr lang="en-US" b="0" dirty="0"/>
+            </a:br>
+            <a:endParaRPr lang="en-US" sz="2500" b="0" dirty="0">
+              <a:latin typeface="+mj-lt"/>
+              <a:cs typeface="Lucida Sans"/>
+            </a:endParaRPr>
+          </a:p>
+        </p:txBody>
+      </p:sp>
+      <p:pic>
+        <p:nvPicPr>
+          <p:cNvPr id="83" name="Gráfico 82">
+            <a:extLst>
+              <a:ext uri="{FF2B5EF4-FFF2-40B4-BE49-F238E27FC236}">
+                <a16:creationId xmlns:a16="http://schemas.microsoft.com/office/drawing/2014/main" id="{D73C871B-6289-B68B-C5EF-D650B8D7E60B}"/>
+              </a:ext>
+            </a:extLst>
+          </p:cNvPr>
+          <p:cNvPicPr>
+            <a:picLocks noChangeAspect="1"/>
+          </p:cNvPicPr>
+          <p:nvPr/>
+        </p:nvPicPr>
+        <p:blipFill>
+          <a:blip r:embed="rId3">
+            <a:extLst>
+              <a:ext uri="{96DAC541-7B7A-43D3-8B79-37D633B846F1}">
+                <asvg:svgBlip xmlns:asvg="http://schemas.microsoft.com/office/drawing/2016/SVG/main" r:embed="rId4"/>
+              </a:ext>
+            </a:extLst>
+          </a:blip>
+          <a:stretch>
+            <a:fillRect/>
+          </a:stretch>
+        </p:blipFill>
+        <p:spPr>
+          <a:xfrm>
+            <a:off x="5045006" y="6356057"/>
+            <a:ext cx="6409575" cy="363174"/>
+          </a:xfrm>
+          <a:prstGeom prst="rect">
+            <a:avLst/>
+          </a:prstGeom>
+        </p:spPr>
+      </p:pic>
+      <p:sp>
+        <p:nvSpPr>
+          <p:cNvPr id="84" name="Marcador de número de diapositiva 83">
+            <a:extLst>
+              <a:ext uri="{FF2B5EF4-FFF2-40B4-BE49-F238E27FC236}">
+                <a16:creationId xmlns:a16="http://schemas.microsoft.com/office/drawing/2014/main" id="{BC7D7B41-FFAD-C47D-4A8B-C8F4F1FAB22D}"/>
+              </a:ext>
+            </a:extLst>
+          </p:cNvPr>
+          <p:cNvSpPr>
+            <a:spLocks noGrp="1"/>
+          </p:cNvSpPr>
+          <p:nvPr>
+            <p:ph type="sldNum" sz="quarter" idx="7"/>
+          </p:nvPr>
+        </p:nvSpPr>
+        <p:spPr/>
+        <p:txBody>
+          <a:bodyPr/>
+          <a:lstStyle/>
+          <a:p>
+            <a:fld id="{B6F15528-21DE-4FAA-801E-634DDDAF4B2B}" type="slidenum">
+              <a:rPr lang="es-ES" smtClean="0"/>
+              <a:t>6</a:t>
+            </a:fld>
+            <a:endParaRPr lang="es-ES"/>
+          </a:p>
+        </p:txBody>
+      </p:sp>
+      <p:sp>
+        <p:nvSpPr>
+          <p:cNvPr id="3" name="Marcador de pie de página 2">
+            <a:extLst>
+              <a:ext uri="{FF2B5EF4-FFF2-40B4-BE49-F238E27FC236}">
+                <a16:creationId xmlns:a16="http://schemas.microsoft.com/office/drawing/2014/main" id="{3955EAD9-FB9D-2409-B16E-8E60363DA636}"/>
+              </a:ext>
+            </a:extLst>
+          </p:cNvPr>
+          <p:cNvSpPr>
+            <a:spLocks noGrp="1"/>
+          </p:cNvSpPr>
+          <p:nvPr>
+            <p:ph type="ftr" sz="quarter" idx="5"/>
+          </p:nvPr>
+        </p:nvSpPr>
+        <p:spPr/>
+        <p:txBody>
+          <a:bodyPr/>
+          <a:lstStyle/>
+          <a:p>
+            <a:pPr marL="12700">
+              <a:spcBef>
+                <a:spcPts val="15"/>
+              </a:spcBef>
+            </a:pPr>
+            <a:r>
+              <a:rPr lang="es-ES" spc="-5"/>
+              <a:t>LAB 1.0. WAVEGUIDES</a:t>
+            </a:r>
+            <a:endParaRPr lang="es-ES" spc="-5" dirty="0"/>
+          </a:p>
+        </p:txBody>
+      </p:sp>
+      <p:pic>
+        <p:nvPicPr>
+          <p:cNvPr id="2052" name="Picture 4">
+            <a:extLst>
+              <a:ext uri="{FF2B5EF4-FFF2-40B4-BE49-F238E27FC236}">
+                <a16:creationId xmlns:a16="http://schemas.microsoft.com/office/drawing/2014/main" id="{6E9BAAA4-D439-9DBD-A325-1B56E39A4D7A}"/>
+              </a:ext>
+            </a:extLst>
+          </p:cNvPr>
+          <p:cNvPicPr>
+            <a:picLocks noChangeAspect="1" noChangeArrowheads="1"/>
+          </p:cNvPicPr>
+          <p:nvPr/>
+        </p:nvPicPr>
+        <p:blipFill>
+          <a:blip r:embed="rId5" cstate="print">
+            <a:extLst>
+              <a:ext uri="{28A0092B-C50C-407E-A947-70E740481C1C}">
+                <a14:useLocalDpi xmlns:a14="http://schemas.microsoft.com/office/drawing/2010/main" val="0"/>
+              </a:ext>
+            </a:extLst>
+          </a:blip>
+          <a:srcRect/>
+          <a:stretch>
+            <a:fillRect/>
+          </a:stretch>
+        </p:blipFill>
+        <p:spPr bwMode="auto">
+          <a:xfrm>
+            <a:off x="152400" y="2927663"/>
+            <a:ext cx="11887200" cy="2453282"/>
+          </a:xfrm>
+          <a:prstGeom prst="rect">
+            <a:avLst/>
+          </a:prstGeom>
+          <a:noFill/>
+          <a:extLst>
+            <a:ext uri="{909E8E84-426E-40DD-AFC4-6F175D3DCCD1}">
+              <a14:hiddenFill xmlns:a14="http://schemas.microsoft.com/office/drawing/2010/main">
+                <a:solidFill>
+                  <a:srgbClr val="FFFFFF"/>
+                </a:solidFill>
+              </a14:hiddenFill>
+            </a:ext>
+          </a:extLst>
+        </p:spPr>
+      </p:pic>
+      <p:sp>
+        <p:nvSpPr>
+          <p:cNvPr id="15" name="CuadroTexto 14">
+            <a:extLst>
+              <a:ext uri="{FF2B5EF4-FFF2-40B4-BE49-F238E27FC236}">
+                <a16:creationId xmlns:a16="http://schemas.microsoft.com/office/drawing/2014/main" id="{A0322851-FE87-B90A-224F-363C95F61BF8}"/>
+              </a:ext>
+            </a:extLst>
+          </p:cNvPr>
+          <p:cNvSpPr txBox="1"/>
+          <p:nvPr/>
+        </p:nvSpPr>
+        <p:spPr>
+          <a:xfrm>
+            <a:off x="304800" y="1475806"/>
+            <a:ext cx="11582400" cy="1754326"/>
+          </a:xfrm>
+          <a:prstGeom prst="rect">
+            <a:avLst/>
+          </a:prstGeom>
+          <a:noFill/>
+        </p:spPr>
+        <p:txBody>
+          <a:bodyPr wrap="square" rtlCol="0">
+            <a:spAutoFit/>
+          </a:bodyPr>
+          <a:lstStyle/>
+          <a:p>
+            <a:r>
+              <a:rPr lang="es-ES" dirty="0"/>
+              <a:t>As </a:t>
+            </a:r>
+            <a:r>
+              <a:rPr lang="es-ES" dirty="0" err="1"/>
+              <a:t>it</a:t>
+            </a:r>
+            <a:r>
+              <a:rPr lang="es-ES" dirty="0"/>
+              <a:t> can be </a:t>
+            </a:r>
+            <a:r>
+              <a:rPr lang="es-ES" dirty="0" err="1"/>
+              <a:t>seen</a:t>
+            </a:r>
+            <a:r>
+              <a:rPr lang="es-ES" dirty="0"/>
+              <a:t> in </a:t>
+            </a:r>
+            <a:r>
+              <a:rPr lang="es-ES" dirty="0" err="1"/>
+              <a:t>the</a:t>
+            </a:r>
+            <a:r>
+              <a:rPr lang="es-ES" dirty="0"/>
+              <a:t> table </a:t>
+            </a:r>
+            <a:r>
+              <a:rPr lang="es-ES" dirty="0" err="1"/>
+              <a:t>below</a:t>
+            </a:r>
+            <a:r>
+              <a:rPr lang="es-ES" dirty="0"/>
+              <a:t>, </a:t>
+            </a:r>
+            <a:r>
+              <a:rPr lang="es-ES" dirty="0" err="1"/>
+              <a:t>the</a:t>
+            </a:r>
+            <a:r>
+              <a:rPr lang="es-ES" dirty="0"/>
+              <a:t> </a:t>
+            </a:r>
+            <a:r>
+              <a:rPr lang="es-ES" dirty="0" err="1"/>
+              <a:t>shallow</a:t>
+            </a:r>
+            <a:r>
+              <a:rPr lang="es-ES" dirty="0"/>
+              <a:t> </a:t>
+            </a:r>
+            <a:r>
+              <a:rPr lang="es-ES" dirty="0" err="1"/>
+              <a:t>waveguide</a:t>
+            </a:r>
+            <a:r>
+              <a:rPr lang="es-ES" dirty="0"/>
+              <a:t> </a:t>
+            </a:r>
+            <a:r>
+              <a:rPr lang="es-ES" dirty="0" err="1"/>
+              <a:t>yields</a:t>
+            </a:r>
+            <a:r>
+              <a:rPr lang="es-ES" dirty="0"/>
+              <a:t> </a:t>
+            </a:r>
+            <a:r>
+              <a:rPr lang="es-ES" dirty="0" err="1"/>
+              <a:t>higher</a:t>
+            </a:r>
+            <a:r>
+              <a:rPr lang="es-ES" dirty="0"/>
+              <a:t> </a:t>
+            </a:r>
+            <a:r>
+              <a:rPr lang="es-ES" dirty="0" err="1"/>
+              <a:t>effective</a:t>
+            </a:r>
+            <a:r>
+              <a:rPr lang="es-ES" dirty="0"/>
+              <a:t> índices for </a:t>
+            </a:r>
+            <a:r>
+              <a:rPr lang="es-ES" dirty="0" err="1"/>
+              <a:t>both</a:t>
+            </a:r>
+            <a:r>
+              <a:rPr lang="es-ES" dirty="0"/>
+              <a:t> TE0 and TM0 </a:t>
+            </a:r>
+            <a:r>
+              <a:rPr lang="es-ES" dirty="0" err="1"/>
+              <a:t>due</a:t>
+            </a:r>
+            <a:r>
+              <a:rPr lang="es-ES" dirty="0"/>
+              <a:t> </a:t>
+            </a:r>
+            <a:r>
+              <a:rPr lang="es-ES" dirty="0" err="1"/>
+              <a:t>to</a:t>
+            </a:r>
+            <a:r>
+              <a:rPr lang="es-ES" dirty="0"/>
+              <a:t> </a:t>
+            </a:r>
+            <a:r>
+              <a:rPr lang="es-ES" dirty="0" err="1"/>
+              <a:t>the</a:t>
+            </a:r>
+            <a:r>
+              <a:rPr lang="es-ES" dirty="0"/>
+              <a:t> </a:t>
+            </a:r>
+            <a:r>
+              <a:rPr lang="es-ES" dirty="0" err="1"/>
+              <a:t>presence</a:t>
+            </a:r>
+            <a:r>
+              <a:rPr lang="es-ES" dirty="0"/>
+              <a:t> </a:t>
+            </a:r>
+            <a:r>
+              <a:rPr lang="es-ES" dirty="0" err="1"/>
+              <a:t>of</a:t>
+            </a:r>
+            <a:r>
+              <a:rPr lang="es-ES" dirty="0"/>
+              <a:t> </a:t>
+            </a:r>
+            <a:r>
+              <a:rPr lang="es-ES" dirty="0" err="1"/>
+              <a:t>the</a:t>
+            </a:r>
+            <a:r>
+              <a:rPr lang="es-ES" dirty="0"/>
+              <a:t> </a:t>
+            </a:r>
+            <a:r>
+              <a:rPr lang="es-ES" dirty="0" err="1"/>
+              <a:t>slab</a:t>
+            </a:r>
+            <a:r>
+              <a:rPr lang="es-ES" dirty="0"/>
+              <a:t>. In </a:t>
+            </a:r>
+            <a:r>
+              <a:rPr lang="es-ES" dirty="0" err="1"/>
+              <a:t>contrast</a:t>
+            </a:r>
+            <a:r>
+              <a:rPr lang="es-ES" dirty="0"/>
+              <a:t>, </a:t>
+            </a:r>
+            <a:r>
+              <a:rPr lang="es-ES" dirty="0" err="1"/>
+              <a:t>the</a:t>
+            </a:r>
+            <a:r>
+              <a:rPr lang="es-ES" dirty="0"/>
+              <a:t> </a:t>
+            </a:r>
+            <a:r>
+              <a:rPr lang="es-ES" dirty="0" err="1"/>
+              <a:t>deep</a:t>
+            </a:r>
+            <a:r>
+              <a:rPr lang="es-ES" dirty="0"/>
+              <a:t> </a:t>
+            </a:r>
+            <a:r>
+              <a:rPr lang="es-ES" dirty="0" err="1"/>
+              <a:t>waveguide</a:t>
+            </a:r>
+            <a:r>
+              <a:rPr lang="es-ES" dirty="0"/>
+              <a:t> shows </a:t>
+            </a:r>
+            <a:r>
+              <a:rPr lang="es-ES" dirty="0" err="1"/>
+              <a:t>larger</a:t>
+            </a:r>
+            <a:r>
+              <a:rPr lang="es-ES" dirty="0"/>
+              <a:t> </a:t>
+            </a:r>
+            <a:r>
+              <a:rPr lang="es-ES" dirty="0" err="1"/>
+              <a:t>group</a:t>
+            </a:r>
+            <a:r>
+              <a:rPr lang="es-ES" dirty="0"/>
+              <a:t> índices </a:t>
+            </a:r>
+            <a:r>
+              <a:rPr lang="es-ES" dirty="0" err="1"/>
+              <a:t>also</a:t>
+            </a:r>
+            <a:r>
+              <a:rPr lang="es-ES" dirty="0"/>
+              <a:t> for </a:t>
+            </a:r>
+            <a:r>
+              <a:rPr lang="es-ES" dirty="0" err="1"/>
+              <a:t>both</a:t>
+            </a:r>
+            <a:r>
+              <a:rPr lang="es-ES" dirty="0"/>
+              <a:t> TE0 and TM0, which </a:t>
+            </a:r>
+            <a:r>
+              <a:rPr lang="es-ES" dirty="0" err="1"/>
+              <a:t>indicates</a:t>
+            </a:r>
+            <a:r>
+              <a:rPr lang="es-ES" dirty="0"/>
+              <a:t> </a:t>
+            </a:r>
+            <a:r>
+              <a:rPr lang="es-ES" dirty="0" err="1"/>
+              <a:t>larger</a:t>
+            </a:r>
+            <a:r>
+              <a:rPr lang="es-ES" dirty="0"/>
+              <a:t> </a:t>
+            </a:r>
+            <a:r>
+              <a:rPr lang="es-ES" dirty="0" err="1"/>
+              <a:t>confinement</a:t>
+            </a:r>
+            <a:r>
+              <a:rPr lang="es-ES" dirty="0"/>
+              <a:t> </a:t>
+            </a:r>
+            <a:r>
+              <a:rPr lang="es-ES" dirty="0" err="1"/>
+              <a:t>inside</a:t>
+            </a:r>
+            <a:r>
+              <a:rPr lang="es-ES" dirty="0"/>
+              <a:t> </a:t>
+            </a:r>
+            <a:r>
+              <a:rPr lang="es-ES" dirty="0" err="1"/>
+              <a:t>the</a:t>
+            </a:r>
+            <a:r>
+              <a:rPr lang="es-ES" dirty="0"/>
+              <a:t> </a:t>
+            </a:r>
+            <a:r>
+              <a:rPr lang="es-ES" dirty="0" err="1"/>
+              <a:t>SiN</a:t>
+            </a:r>
+            <a:r>
+              <a:rPr lang="es-ES" dirty="0"/>
+              <a:t> </a:t>
+            </a:r>
+            <a:r>
+              <a:rPr lang="es-ES" dirty="0" err="1"/>
+              <a:t>core</a:t>
+            </a:r>
+            <a:r>
+              <a:rPr lang="es-ES" dirty="0"/>
+              <a:t>. </a:t>
+            </a:r>
+          </a:p>
+          <a:p>
+            <a:endParaRPr lang="es-ES" dirty="0"/>
+          </a:p>
+          <a:p>
+            <a:r>
+              <a:rPr lang="es-ES" dirty="0" err="1"/>
+              <a:t>Both</a:t>
+            </a:r>
+            <a:r>
+              <a:rPr lang="es-ES" dirty="0"/>
+              <a:t> </a:t>
+            </a:r>
+            <a:r>
+              <a:rPr lang="es-ES" dirty="0" err="1"/>
+              <a:t>structures</a:t>
+            </a:r>
+            <a:r>
+              <a:rPr lang="es-ES" dirty="0"/>
+              <a:t> show negative </a:t>
+            </a:r>
+            <a:r>
+              <a:rPr lang="es-ES" dirty="0" err="1"/>
+              <a:t>values</a:t>
+            </a:r>
+            <a:r>
+              <a:rPr lang="es-ES" dirty="0"/>
+              <a:t> </a:t>
+            </a:r>
+            <a:r>
+              <a:rPr lang="es-ES" dirty="0" err="1"/>
+              <a:t>of</a:t>
+            </a:r>
+            <a:r>
+              <a:rPr lang="es-ES" dirty="0"/>
+              <a:t> </a:t>
+            </a:r>
+            <a:r>
+              <a:rPr lang="es-ES" dirty="0" err="1"/>
+              <a:t>dispersion</a:t>
+            </a:r>
+            <a:r>
+              <a:rPr lang="es-ES" dirty="0"/>
+              <a:t> </a:t>
+            </a:r>
+            <a:r>
+              <a:rPr lang="es-ES" dirty="0" err="1"/>
+              <a:t>but</a:t>
+            </a:r>
+            <a:r>
+              <a:rPr lang="es-ES" dirty="0"/>
+              <a:t> </a:t>
+            </a:r>
+            <a:r>
+              <a:rPr lang="es-ES" dirty="0" err="1"/>
+              <a:t>the</a:t>
+            </a:r>
+            <a:r>
+              <a:rPr lang="es-ES" dirty="0"/>
+              <a:t> </a:t>
+            </a:r>
+            <a:r>
+              <a:rPr lang="es-ES" dirty="0" err="1"/>
+              <a:t>shallow</a:t>
+            </a:r>
+            <a:r>
+              <a:rPr lang="es-ES" dirty="0"/>
+              <a:t> </a:t>
+            </a:r>
+            <a:r>
+              <a:rPr lang="es-ES" dirty="0" err="1"/>
+              <a:t>waveguide</a:t>
+            </a:r>
+            <a:r>
+              <a:rPr lang="es-ES" dirty="0"/>
+              <a:t> </a:t>
+            </a:r>
+            <a:r>
+              <a:rPr lang="es-ES" dirty="0" err="1"/>
+              <a:t>displays</a:t>
+            </a:r>
+            <a:r>
+              <a:rPr lang="es-ES" dirty="0"/>
+              <a:t> more negative </a:t>
+            </a:r>
+            <a:r>
+              <a:rPr lang="es-ES" dirty="0" err="1"/>
+              <a:t>values</a:t>
+            </a:r>
+            <a:r>
+              <a:rPr lang="es-ES" dirty="0"/>
+              <a:t>. </a:t>
+            </a:r>
+            <a:r>
+              <a:rPr lang="es-ES" dirty="0" err="1"/>
+              <a:t>Specifically</a:t>
+            </a:r>
+            <a:r>
+              <a:rPr lang="es-ES" dirty="0"/>
+              <a:t>, for TM0.    </a:t>
+            </a:r>
+          </a:p>
+        </p:txBody>
+      </p:sp>
+    </p:spTree>
+    <p:extLst>
+      <p:ext uri="{BB962C8B-B14F-4D97-AF65-F5344CB8AC3E}">
+        <p14:creationId xmlns:p14="http://schemas.microsoft.com/office/powerpoint/2010/main" val="1179103704"/>
+      </p:ext>
+    </p:extLst>
+  </p:cSld>
+  <p:clrMapOvr>
+    <a:masterClrMapping/>
+  </p:clrMapOvr>
+</p:sld>
+</file>
+
+<file path=ppt/slides/slide7.xml><?xml version="1.0" encoding="utf-8"?>
+<p:sld xmlns:a="http://schemas.openxmlformats.org/drawingml/2006/main" xmlns:r="http://schemas.openxmlformats.org/officeDocument/2006/relationships" xmlns:p="http://schemas.openxmlformats.org/presentationml/2006/main">
+  <p:cSld>
+    <p:spTree>
+      <p:nvGrpSpPr>
+        <p:cNvPr id="1" name="">
+          <a:extLst>
+            <a:ext uri="{FF2B5EF4-FFF2-40B4-BE49-F238E27FC236}">
               <a16:creationId xmlns:a16="http://schemas.microsoft.com/office/drawing/2014/main" id="{25434E70-43B1-3881-1771-20FB4358471D}"/>
             </a:ext>
           </a:extLst>
@@ -7499,8 +8808,8 @@
         </p:nvSpPr>
         <p:spPr>
           <a:xfrm>
-            <a:off x="685800" y="408883"/>
-            <a:ext cx="10994410" cy="1090042"/>
+            <a:off x="609600" y="120927"/>
+            <a:ext cx="10994410" cy="1166986"/>
           </a:xfrm>
           <a:prstGeom prst="rect">
             <a:avLst/>
@@ -7527,18 +8836,6 @@
             <a:br>
               <a:rPr lang="en-US" sz="2500" dirty="0"/>
             </a:br>
-            <a:r>
-              <a:rPr lang="en-US" b="0" dirty="0"/>
-              <a:t>Find  neff_TE0 for </a:t>
-            </a:r>
-            <a:r>
-              <a:rPr lang="en-US" b="0" dirty="0" err="1"/>
-              <a:t>wvl</a:t>
-            </a:r>
-            <a:r>
-              <a:rPr lang="en-US" b="0" dirty="0"/>
-              <a:t> 1.55 µm, width 1.0 µm for R=25,50,75,100, 125,150 µm</a:t>
-            </a:r>
             <a:br>
               <a:rPr lang="en-US" sz="2500" dirty="0"/>
             </a:br>
@@ -7608,7 +8905,7 @@
           <a:p>
             <a:fld id="{B6F15528-21DE-4FAA-801E-634DDDAF4B2B}" type="slidenum">
               <a:rPr lang="es-ES" smtClean="0"/>
-              <a:t>6</a:t>
+              <a:t>7</a:t>
             </a:fld>
             <a:endParaRPr lang="es-ES"/>
           </a:p>
@@ -7645,477 +8942,6 @@
               <a:t>LAB 1.0. WAVEGUIDES</a:t>
             </a:r>
             <a:endParaRPr lang="es-ES" spc="-5" dirty="0"/>
-          </a:p>
-        </p:txBody>
-      </p:sp>
-      <p:sp>
-        <p:nvSpPr>
-          <p:cNvPr id="2" name="CuadroTexto 1">
-            <a:extLst>
-              <a:ext uri="{FF2B5EF4-FFF2-40B4-BE49-F238E27FC236}">
-                <a16:creationId xmlns:a16="http://schemas.microsoft.com/office/drawing/2014/main" id="{FDE3A197-9508-F9F1-1FEB-FF883D78C151}"/>
-              </a:ext>
-            </a:extLst>
-          </p:cNvPr>
-          <p:cNvSpPr txBox="1"/>
-          <p:nvPr/>
-        </p:nvSpPr>
-        <p:spPr>
-          <a:xfrm>
-            <a:off x="609441" y="4860334"/>
-            <a:ext cx="11199971" cy="1200329"/>
-          </a:xfrm>
-          <a:prstGeom prst="rect">
-            <a:avLst/>
-          </a:prstGeom>
-          <a:solidFill>
-            <a:schemeClr val="bg1">
-              <a:lumMod val="95000"/>
-            </a:schemeClr>
-          </a:solidFill>
-          <a:ln w="28575">
-            <a:solidFill>
-              <a:srgbClr val="E0700D"/>
-            </a:solidFill>
-          </a:ln>
-        </p:spPr>
-        <p:txBody>
-          <a:bodyPr wrap="square" rtlCol="0">
-            <a:spAutoFit/>
-          </a:bodyPr>
-          <a:lstStyle/>
-          <a:p>
-            <a:pPr algn="just"/>
-            <a:r>
-              <a:rPr lang="en-US" sz="1200" dirty="0">
-                <a:latin typeface="Arial" panose="020B0604020202020204" pitchFamily="34" charset="0"/>
-                <a:cs typeface="Arial" panose="020B0604020202020204" pitchFamily="34" charset="0"/>
-              </a:rPr>
-              <a:t>Comment results, which is the safe radius, consider safe means less than 0.1 dB/90º.</a:t>
-            </a:r>
-          </a:p>
-          <a:p>
-            <a:pPr algn="just"/>
-            <a:endParaRPr lang="en-US" sz="1200" u="sng" dirty="0">
-              <a:latin typeface="Arial" panose="020B0604020202020204" pitchFamily="34" charset="0"/>
-              <a:cs typeface="Arial" panose="020B0604020202020204" pitchFamily="34" charset="0"/>
-            </a:endParaRPr>
-          </a:p>
-          <a:p>
-            <a:pPr algn="just"/>
-            <a:endParaRPr lang="en-US" sz="1200" dirty="0">
-              <a:latin typeface="Arial" panose="020B0604020202020204" pitchFamily="34" charset="0"/>
-              <a:cs typeface="Arial" panose="020B0604020202020204" pitchFamily="34" charset="0"/>
-            </a:endParaRPr>
-          </a:p>
-          <a:p>
-            <a:pPr algn="just"/>
-            <a:endParaRPr lang="en-US" sz="1200" dirty="0">
-              <a:latin typeface="Arial" panose="020B0604020202020204" pitchFamily="34" charset="0"/>
-              <a:cs typeface="Arial" panose="020B0604020202020204" pitchFamily="34" charset="0"/>
-            </a:endParaRPr>
-          </a:p>
-          <a:p>
-            <a:pPr algn="just"/>
-            <a:endParaRPr lang="en-US" sz="1200" dirty="0">
-              <a:latin typeface="Arial" panose="020B0604020202020204" pitchFamily="34" charset="0"/>
-              <a:cs typeface="Arial" panose="020B0604020202020204" pitchFamily="34" charset="0"/>
-            </a:endParaRPr>
-          </a:p>
-          <a:p>
-            <a:pPr algn="just"/>
-            <a:endParaRPr lang="en-US" sz="1200" dirty="0">
-              <a:latin typeface="Arial" panose="020B0604020202020204" pitchFamily="34" charset="0"/>
-              <a:cs typeface="Arial" panose="020B0604020202020204" pitchFamily="34" charset="0"/>
-            </a:endParaRPr>
-          </a:p>
-        </p:txBody>
-      </p:sp>
-      <mc:AlternateContent xmlns:mc="http://schemas.openxmlformats.org/markup-compatibility/2006" xmlns:a14="http://schemas.microsoft.com/office/drawing/2010/main">
-        <mc:Choice Requires="a14">
-          <p:sp>
-            <p:nvSpPr>
-              <p:cNvPr id="6" name="CuadroTexto 5">
-                <a:extLst>
-                  <a:ext uri="{FF2B5EF4-FFF2-40B4-BE49-F238E27FC236}">
-                    <a16:creationId xmlns:a16="http://schemas.microsoft.com/office/drawing/2014/main" id="{409FBBBB-69CA-B7E5-7176-8227F2788CF5}"/>
-                  </a:ext>
-                </a:extLst>
-              </p:cNvPr>
-              <p:cNvSpPr txBox="1"/>
-              <p:nvPr/>
-            </p:nvSpPr>
-            <p:spPr>
-              <a:xfrm>
-                <a:off x="9941529" y="4179383"/>
-                <a:ext cx="1856534" cy="439608"/>
-              </a:xfrm>
-              <a:prstGeom prst="rect">
-                <a:avLst/>
-              </a:prstGeom>
-              <a:noFill/>
-            </p:spPr>
-            <p:txBody>
-              <a:bodyPr wrap="none" lIns="0" tIns="0" rIns="0" bIns="0" rtlCol="0">
-                <a:spAutoFit/>
-              </a:bodyPr>
-              <a:lstStyle/>
-              <a:p>
-                <a14:m>
-                  <m:oMath xmlns:m="http://schemas.openxmlformats.org/officeDocument/2006/math">
-                    <m:r>
-                      <a:rPr lang="es-ES" sz="1800" b="0" i="1" smtClean="0">
-                        <a:latin typeface="Cambria Math" panose="02040503050406030204" pitchFamily="18" charset="0"/>
-                      </a:rPr>
-                      <m:t>𝛼</m:t>
-                    </m:r>
-                    <m:d>
-                      <m:dPr>
-                        <m:begChr m:val="["/>
-                        <m:endChr m:val="]"/>
-                        <m:ctrlPr>
-                          <a:rPr lang="es-ES" sz="1800" b="0" i="1" smtClean="0">
-                            <a:latin typeface="Cambria Math" panose="02040503050406030204" pitchFamily="18" charset="0"/>
-                          </a:rPr>
-                        </m:ctrlPr>
-                      </m:dPr>
-                      <m:e>
-                        <m:f>
-                          <m:fPr>
-                            <m:ctrlPr>
-                              <a:rPr lang="es-ES" sz="1800" b="0" i="1" smtClean="0">
-                                <a:latin typeface="Cambria Math" panose="02040503050406030204" pitchFamily="18" charset="0"/>
-                              </a:rPr>
-                            </m:ctrlPr>
-                          </m:fPr>
-                          <m:num>
-                            <m:r>
-                              <a:rPr lang="es-ES" sz="1800" b="0" i="1" smtClean="0">
-                                <a:latin typeface="Cambria Math" panose="02040503050406030204" pitchFamily="18" charset="0"/>
-                              </a:rPr>
-                              <m:t>𝑑𝐵</m:t>
-                            </m:r>
-                          </m:num>
-                          <m:den>
-                            <m:r>
-                              <a:rPr lang="es-ES" sz="1800" b="0" i="1" smtClean="0">
-                                <a:latin typeface="Cambria Math" panose="02040503050406030204" pitchFamily="18" charset="0"/>
-                              </a:rPr>
-                              <m:t>90</m:t>
-                            </m:r>
-                            <m:r>
-                              <a:rPr lang="es-ES" sz="1800" b="0" i="1" smtClean="0">
-                                <a:latin typeface="Cambria Math" panose="02040503050406030204" pitchFamily="18" charset="0"/>
-                                <a:ea typeface="Cambria Math" panose="02040503050406030204" pitchFamily="18" charset="0"/>
-                              </a:rPr>
-                              <m:t>°</m:t>
-                            </m:r>
-                          </m:den>
-                        </m:f>
-                      </m:e>
-                    </m:d>
-                    <m:r>
-                      <a:rPr lang="es-ES" sz="1800" b="0" i="1" smtClean="0">
-                        <a:latin typeface="Cambria Math" panose="02040503050406030204" pitchFamily="18" charset="0"/>
-                      </a:rPr>
-                      <m:t>=</m:t>
-                    </m:r>
-                  </m:oMath>
-                </a14:m>
-                <a:r>
-                  <a:rPr lang="es-ES" sz="1800" dirty="0"/>
-                  <a:t> </a:t>
-                </a:r>
-                <a14:m>
-                  <m:oMath xmlns:m="http://schemas.openxmlformats.org/officeDocument/2006/math">
-                    <m:r>
-                      <m:rPr>
-                        <m:sty m:val="p"/>
-                      </m:rPr>
-                      <a:rPr lang="es-ES" sz="1800" b="0" i="0" smtClean="0">
-                        <a:latin typeface="Cambria Math" panose="02040503050406030204" pitchFamily="18" charset="0"/>
-                      </a:rPr>
-                      <m:t>R</m:t>
-                    </m:r>
-                    <m:f>
-                      <m:fPr>
-                        <m:ctrlPr>
-                          <a:rPr lang="es-ES" sz="1800" b="0" i="1" smtClean="0">
-                            <a:latin typeface="Cambria Math" panose="02040503050406030204" pitchFamily="18" charset="0"/>
-                          </a:rPr>
-                        </m:ctrlPr>
-                      </m:fPr>
-                      <m:num>
-                        <m:r>
-                          <a:rPr lang="es-ES" sz="1800" b="0" i="1" smtClean="0">
-                            <a:latin typeface="Cambria Math" panose="02040503050406030204" pitchFamily="18" charset="0"/>
-                          </a:rPr>
-                          <m:t>𝜋</m:t>
-                        </m:r>
-                      </m:num>
-                      <m:den>
-                        <m:r>
-                          <a:rPr lang="es-ES" sz="1800" b="0" i="1" smtClean="0">
-                            <a:latin typeface="Cambria Math" panose="02040503050406030204" pitchFamily="18" charset="0"/>
-                          </a:rPr>
-                          <m:t>2</m:t>
-                        </m:r>
-                      </m:den>
-                    </m:f>
-                    <m:r>
-                      <a:rPr lang="es-ES" sz="1800" i="1">
-                        <a:latin typeface="Cambria Math" panose="02040503050406030204" pitchFamily="18" charset="0"/>
-                      </a:rPr>
-                      <m:t>𝛼</m:t>
-                    </m:r>
-                    <m:d>
-                      <m:dPr>
-                        <m:begChr m:val="["/>
-                        <m:endChr m:val="]"/>
-                        <m:ctrlPr>
-                          <a:rPr lang="es-ES" sz="1800" i="1">
-                            <a:latin typeface="Cambria Math" panose="02040503050406030204" pitchFamily="18" charset="0"/>
-                          </a:rPr>
-                        </m:ctrlPr>
-                      </m:dPr>
-                      <m:e>
-                        <m:f>
-                          <m:fPr>
-                            <m:ctrlPr>
-                              <a:rPr lang="es-ES" sz="1800" i="1">
-                                <a:latin typeface="Cambria Math" panose="02040503050406030204" pitchFamily="18" charset="0"/>
-                              </a:rPr>
-                            </m:ctrlPr>
-                          </m:fPr>
-                          <m:num>
-                            <m:r>
-                              <a:rPr lang="es-ES" sz="1800" i="1">
-                                <a:latin typeface="Cambria Math" panose="02040503050406030204" pitchFamily="18" charset="0"/>
-                              </a:rPr>
-                              <m:t>𝑑𝐵</m:t>
-                            </m:r>
-                          </m:num>
-                          <m:den>
-                            <m:r>
-                              <a:rPr lang="es-ES" sz="1800" i="1">
-                                <a:latin typeface="Cambria Math" panose="02040503050406030204" pitchFamily="18" charset="0"/>
-                              </a:rPr>
-                              <m:t>µ</m:t>
-                            </m:r>
-                            <m:r>
-                              <a:rPr lang="es-ES" sz="1800" i="1">
-                                <a:latin typeface="Cambria Math" panose="02040503050406030204" pitchFamily="18" charset="0"/>
-                              </a:rPr>
-                              <m:t>𝑚</m:t>
-                            </m:r>
-                          </m:den>
-                        </m:f>
-                      </m:e>
-                    </m:d>
-                  </m:oMath>
-                </a14:m>
-                <a:endParaRPr lang="en-US" sz="1800" dirty="0"/>
-              </a:p>
-            </p:txBody>
-          </p:sp>
-        </mc:Choice>
-        <mc:Fallback xmlns="">
-          <p:sp>
-            <p:nvSpPr>
-              <p:cNvPr id="6" name="CuadroTexto 5">
-                <a:extLst>
-                  <a:ext uri="{FF2B5EF4-FFF2-40B4-BE49-F238E27FC236}">
-                    <a16:creationId xmlns:a16="http://schemas.microsoft.com/office/drawing/2014/main" id="{409FBBBB-69CA-B7E5-7176-8227F2788CF5}"/>
-                  </a:ext>
-                </a:extLst>
-              </p:cNvPr>
-              <p:cNvSpPr txBox="1">
-                <a:spLocks noRot="1" noChangeAspect="1" noMove="1" noResize="1" noEditPoints="1" noAdjustHandles="1" noChangeArrowheads="1" noChangeShapeType="1" noTextEdit="1"/>
-              </p:cNvSpPr>
-              <p:nvPr/>
-            </p:nvSpPr>
-            <p:spPr>
-              <a:xfrm>
-                <a:off x="9941529" y="4179383"/>
-                <a:ext cx="1856534" cy="439608"/>
-              </a:xfrm>
-              <a:prstGeom prst="rect">
-                <a:avLst/>
-              </a:prstGeom>
-              <a:blipFill>
-                <a:blip r:embed="rId5"/>
-                <a:stretch>
-                  <a:fillRect l="-3289" b="-13889"/>
-                </a:stretch>
-              </a:blipFill>
-            </p:spPr>
-            <p:txBody>
-              <a:bodyPr/>
-              <a:lstStyle/>
-              <a:p>
-                <a:r>
-                  <a:rPr lang="es-ES">
-                    <a:noFill/>
-                  </a:rPr>
-                  <a:t> </a:t>
-                </a:r>
-              </a:p>
-            </p:txBody>
-          </p:sp>
-        </mc:Fallback>
-      </mc:AlternateContent>
-      <p:sp>
-        <p:nvSpPr>
-          <p:cNvPr id="7" name="Rectángulo 6">
-            <a:extLst>
-              <a:ext uri="{FF2B5EF4-FFF2-40B4-BE49-F238E27FC236}">
-                <a16:creationId xmlns:a16="http://schemas.microsoft.com/office/drawing/2014/main" id="{B5FE8755-B0BF-14B7-64E6-4BBB2560B9A6}"/>
-              </a:ext>
-            </a:extLst>
-          </p:cNvPr>
-          <p:cNvSpPr/>
-          <p:nvPr/>
-        </p:nvSpPr>
-        <p:spPr>
-          <a:xfrm>
-            <a:off x="609441" y="1418373"/>
-            <a:ext cx="11199971" cy="3306028"/>
-          </a:xfrm>
-          <a:prstGeom prst="rect">
-            <a:avLst/>
-          </a:prstGeom>
-          <a:noFill/>
-          <a:ln w="28575">
-            <a:solidFill>
-              <a:srgbClr val="E0700D"/>
-            </a:solidFill>
-          </a:ln>
-        </p:spPr>
-        <p:style>
-          <a:lnRef idx="2">
-            <a:schemeClr val="accent1">
-              <a:shade val="15000"/>
-            </a:schemeClr>
-          </a:lnRef>
-          <a:fillRef idx="1">
-            <a:schemeClr val="accent1"/>
-          </a:fillRef>
-          <a:effectRef idx="0">
-            <a:schemeClr val="accent1"/>
-          </a:effectRef>
-          <a:fontRef idx="minor">
-            <a:schemeClr val="lt1"/>
-          </a:fontRef>
-        </p:style>
-        <p:txBody>
-          <a:bodyPr rtlCol="0" anchor="ctr"/>
-          <a:lstStyle/>
-          <a:p>
-            <a:pPr algn="ctr"/>
-            <a:endParaRPr lang="en-US"/>
-          </a:p>
-        </p:txBody>
-      </p:sp>
-      <p:sp>
-        <p:nvSpPr>
-          <p:cNvPr id="8" name="CuadroTexto 7">
-            <a:extLst>
-              <a:ext uri="{FF2B5EF4-FFF2-40B4-BE49-F238E27FC236}">
-                <a16:creationId xmlns:a16="http://schemas.microsoft.com/office/drawing/2014/main" id="{331EBD86-BA6C-68C9-2D38-FC8CFBA7ADC4}"/>
-              </a:ext>
-            </a:extLst>
-          </p:cNvPr>
-          <p:cNvSpPr txBox="1"/>
-          <p:nvPr/>
-        </p:nvSpPr>
-        <p:spPr>
-          <a:xfrm>
-            <a:off x="3200400" y="2911778"/>
-            <a:ext cx="6235717" cy="923330"/>
-          </a:xfrm>
-          <a:prstGeom prst="rect">
-            <a:avLst/>
-          </a:prstGeom>
-          <a:noFill/>
-        </p:spPr>
-        <p:txBody>
-          <a:bodyPr wrap="square" rtlCol="0">
-            <a:spAutoFit/>
-          </a:bodyPr>
-          <a:lstStyle/>
-          <a:p>
-            <a:pPr algn="ctr"/>
-            <a:r>
-              <a:rPr lang="en-US" b="1" dirty="0"/>
-              <a:t>deep</a:t>
-            </a:r>
-            <a:r>
-              <a:rPr lang="en-US" dirty="0"/>
-              <a:t> waveguide</a:t>
-            </a:r>
-          </a:p>
-          <a:p>
-            <a:pPr algn="ctr"/>
-            <a:endParaRPr lang="en-US" dirty="0"/>
-          </a:p>
-          <a:p>
-            <a:pPr algn="ctr"/>
-            <a:r>
-              <a:rPr lang="en-US" dirty="0"/>
-              <a:t>Paste dB/90º neff_TE0 &amp; neff_TM0 vs R</a:t>
-            </a:r>
-          </a:p>
-        </p:txBody>
-      </p:sp>
-      <p:sp>
-        <p:nvSpPr>
-          <p:cNvPr id="11" name="CuadroTexto 10">
-            <a:extLst>
-              <a:ext uri="{FF2B5EF4-FFF2-40B4-BE49-F238E27FC236}">
-                <a16:creationId xmlns:a16="http://schemas.microsoft.com/office/drawing/2014/main" id="{AC3A4C9A-F8AC-9BD8-BC33-202373CF7FF7}"/>
-              </a:ext>
-            </a:extLst>
-          </p:cNvPr>
-          <p:cNvSpPr txBox="1"/>
-          <p:nvPr/>
-        </p:nvSpPr>
-        <p:spPr>
-          <a:xfrm>
-            <a:off x="4479276" y="1586669"/>
-            <a:ext cx="1752600" cy="1754326"/>
-          </a:xfrm>
-          <a:prstGeom prst="rect">
-            <a:avLst/>
-          </a:prstGeom>
-          <a:noFill/>
-        </p:spPr>
-        <p:txBody>
-          <a:bodyPr wrap="square" rtlCol="0">
-            <a:spAutoFit/>
-          </a:bodyPr>
-          <a:lstStyle/>
-          <a:p>
-            <a:r>
-              <a:rPr lang="es-ES" dirty="0" err="1"/>
-              <a:t>Safe</a:t>
-            </a:r>
-            <a:r>
-              <a:rPr lang="es-ES" dirty="0"/>
-              <a:t> </a:t>
-            </a:r>
-            <a:r>
-              <a:rPr lang="es-ES" dirty="0" err="1"/>
-              <a:t>radiu</a:t>
-            </a:r>
-            <a:r>
-              <a:rPr lang="es-ES" dirty="0"/>
-              <a:t> TE s : 75 -&gt; analizando que se ve que se estabiliza el índice a partir de </a:t>
-            </a:r>
-            <a:r>
-              <a:rPr lang="es-ES" dirty="0" err="1"/>
-              <a:t>ahi</a:t>
-            </a:r>
-            <a:endParaRPr lang="es-ES" dirty="0"/>
           </a:p>
         </p:txBody>
       </p:sp>
@@ -8172,6 +8998,36 @@
             <a:extLst>
               <a:ext uri="{FF2B5EF4-FFF2-40B4-BE49-F238E27FC236}">
                 <a16:creationId xmlns:a16="http://schemas.microsoft.com/office/drawing/2014/main" id="{7C5F36ED-4157-C8D0-384E-8DF8E59CD97C}"/>
+              </a:ext>
+            </a:extLst>
+          </p:cNvPr>
+          <p:cNvPicPr>
+            <a:picLocks noChangeAspect="1"/>
+          </p:cNvPicPr>
+          <p:nvPr/>
+        </p:nvPicPr>
+        <p:blipFill>
+          <a:blip r:embed="rId5"/>
+          <a:stretch>
+            <a:fillRect/>
+          </a:stretch>
+        </p:blipFill>
+        <p:spPr>
+          <a:xfrm>
+            <a:off x="878626" y="599258"/>
+            <a:ext cx="4166380" cy="3291151"/>
+          </a:xfrm>
+          <a:prstGeom prst="rect">
+            <a:avLst/>
+          </a:prstGeom>
+        </p:spPr>
+      </p:pic>
+      <p:pic>
+        <p:nvPicPr>
+          <p:cNvPr id="14" name="Imagen 13">
+            <a:extLst>
+              <a:ext uri="{FF2B5EF4-FFF2-40B4-BE49-F238E27FC236}">
+                <a16:creationId xmlns:a16="http://schemas.microsoft.com/office/drawing/2014/main" id="{5F318440-5FBC-93FE-71CA-D4592689E815}"/>
               </a:ext>
             </a:extLst>
           </p:cNvPr>
@@ -8188,8 +9044,8 @@
         </p:blipFill>
         <p:spPr>
           <a:xfrm>
-            <a:off x="927127" y="1529762"/>
-            <a:ext cx="3594093" cy="2839084"/>
+            <a:off x="5873743" y="556760"/>
+            <a:ext cx="4166380" cy="3196801"/>
           </a:xfrm>
           <a:prstGeom prst="rect">
             <a:avLst/>
@@ -8198,10 +9054,10 @@
       </p:pic>
       <p:pic>
         <p:nvPicPr>
-          <p:cNvPr id="14" name="Imagen 13">
-            <a:extLst>
-              <a:ext uri="{FF2B5EF4-FFF2-40B4-BE49-F238E27FC236}">
-                <a16:creationId xmlns:a16="http://schemas.microsoft.com/office/drawing/2014/main" id="{5F318440-5FBC-93FE-71CA-D4592689E815}"/>
+          <p:cNvPr id="17" name="Imagen 16">
+            <a:extLst>
+              <a:ext uri="{FF2B5EF4-FFF2-40B4-BE49-F238E27FC236}">
+                <a16:creationId xmlns:a16="http://schemas.microsoft.com/office/drawing/2014/main" id="{6EE2FD55-2C96-EE36-8DD6-EBAD47C070D9}"/>
               </a:ext>
             </a:extLst>
           </p:cNvPr>
@@ -8218,38 +9074,8 @@
         </p:blipFill>
         <p:spPr>
           <a:xfrm>
-            <a:off x="8382000" y="2635622"/>
-            <a:ext cx="4023957" cy="3087522"/>
-          </a:xfrm>
-          <a:prstGeom prst="rect">
-            <a:avLst/>
-          </a:prstGeom>
-        </p:spPr>
-      </p:pic>
-      <p:pic>
-        <p:nvPicPr>
-          <p:cNvPr id="17" name="Imagen 16">
-            <a:extLst>
-              <a:ext uri="{FF2B5EF4-FFF2-40B4-BE49-F238E27FC236}">
-                <a16:creationId xmlns:a16="http://schemas.microsoft.com/office/drawing/2014/main" id="{6EE2FD55-2C96-EE36-8DD6-EBAD47C070D9}"/>
-              </a:ext>
-            </a:extLst>
-          </p:cNvPr>
-          <p:cNvPicPr>
-            <a:picLocks noChangeAspect="1"/>
-          </p:cNvPicPr>
-          <p:nvPr/>
-        </p:nvPicPr>
-        <p:blipFill>
-          <a:blip r:embed="rId8"/>
-          <a:stretch>
-            <a:fillRect/>
-          </a:stretch>
-        </p:blipFill>
-        <p:spPr>
-          <a:xfrm>
-            <a:off x="3478395" y="3640018"/>
-            <a:ext cx="3754361" cy="2520785"/>
+            <a:off x="3529821" y="3726405"/>
+            <a:ext cx="4358708" cy="2926561"/>
           </a:xfrm>
           <a:prstGeom prst="rect">
             <a:avLst/>
@@ -8269,12 +9095,18 @@
 </p:sld>
 </file>
 
-<file path=ppt/slides/slide7.xml><?xml version="1.0" encoding="utf-8"?>
+<file path=ppt/slides/slide8.xml><?xml version="1.0" encoding="utf-8"?>
 <p:sld xmlns:a="http://schemas.openxmlformats.org/drawingml/2006/main" xmlns:r="http://schemas.openxmlformats.org/officeDocument/2006/relationships" xmlns:p="http://schemas.openxmlformats.org/presentationml/2006/main">
   <p:cSld>
     <p:spTree>
       <p:nvGrpSpPr>
-        <p:cNvPr id="1" name=""/>
+        <p:cNvPr id="1" name="">
+          <a:extLst>
+            <a:ext uri="{FF2B5EF4-FFF2-40B4-BE49-F238E27FC236}">
+              <a16:creationId xmlns:a16="http://schemas.microsoft.com/office/drawing/2014/main" id="{1B0FC21F-7293-F452-90CE-F3E17670DCF6}"/>
+            </a:ext>
+          </a:extLst>
+        </p:cNvPr>
         <p:cNvGrpSpPr/>
         <p:nvPr/>
       </p:nvGrpSpPr>
@@ -8288,10 +9120,96 @@
       </p:grpSpPr>
       <p:sp>
         <p:nvSpPr>
-          <p:cNvPr id="2" name="Marcador de número de diapositiva 1">
-            <a:extLst>
-              <a:ext uri="{FF2B5EF4-FFF2-40B4-BE49-F238E27FC236}">
-                <a16:creationId xmlns:a16="http://schemas.microsoft.com/office/drawing/2014/main" id="{9EBBD3C8-ECF7-96F6-561E-73501DE7A063}"/>
+          <p:cNvPr id="16" name="object 16">
+            <a:extLst>
+              <a:ext uri="{FF2B5EF4-FFF2-40B4-BE49-F238E27FC236}">
+                <a16:creationId xmlns:a16="http://schemas.microsoft.com/office/drawing/2014/main" id="{383F7ACF-319A-3963-FFF7-DD9B5F40E2E7}"/>
+              </a:ext>
+            </a:extLst>
+          </p:cNvPr>
+          <p:cNvSpPr txBox="1">
+            <a:spLocks noGrp="1"/>
+          </p:cNvSpPr>
+          <p:nvPr>
+            <p:ph type="title"/>
+          </p:nvPr>
+        </p:nvSpPr>
+        <p:spPr>
+          <a:xfrm>
+            <a:off x="685800" y="408883"/>
+            <a:ext cx="10994410" cy="397545"/>
+          </a:xfrm>
+          <a:prstGeom prst="rect">
+            <a:avLst/>
+          </a:prstGeom>
+        </p:spPr>
+        <p:txBody>
+          <a:bodyPr vert="horz" wrap="square" lIns="0" tIns="12700" rIns="0" bIns="0" rtlCol="0">
+            <a:spAutoFit/>
+          </a:bodyPr>
+          <a:lstStyle/>
+          <a:p>
+            <a:pPr marL="12700">
+              <a:lnSpc>
+                <a:spcPct val="100000"/>
+              </a:lnSpc>
+              <a:spcBef>
+                <a:spcPts val="100"/>
+              </a:spcBef>
+            </a:pPr>
+            <a:r>
+              <a:rPr lang="en-US" sz="2500" dirty="0"/>
+              <a:t>Learning outcome #4 – Bend waveguide radius vs. loss – deep</a:t>
+            </a:r>
+            <a:endParaRPr lang="en-US" sz="2500" b="0" dirty="0">
+              <a:latin typeface="+mj-lt"/>
+              <a:cs typeface="Lucida Sans"/>
+            </a:endParaRPr>
+          </a:p>
+        </p:txBody>
+      </p:sp>
+      <p:pic>
+        <p:nvPicPr>
+          <p:cNvPr id="83" name="Gráfico 82">
+            <a:extLst>
+              <a:ext uri="{FF2B5EF4-FFF2-40B4-BE49-F238E27FC236}">
+                <a16:creationId xmlns:a16="http://schemas.microsoft.com/office/drawing/2014/main" id="{774603F4-5EF9-0FBB-6A00-E529A726A411}"/>
+              </a:ext>
+            </a:extLst>
+          </p:cNvPr>
+          <p:cNvPicPr>
+            <a:picLocks noChangeAspect="1"/>
+          </p:cNvPicPr>
+          <p:nvPr/>
+        </p:nvPicPr>
+        <p:blipFill>
+          <a:blip r:embed="rId3">
+            <a:extLst>
+              <a:ext uri="{96DAC541-7B7A-43D3-8B79-37D633B846F1}">
+                <asvg:svgBlip xmlns:asvg="http://schemas.microsoft.com/office/drawing/2016/SVG/main" r:embed="rId4"/>
+              </a:ext>
+            </a:extLst>
+          </a:blip>
+          <a:stretch>
+            <a:fillRect/>
+          </a:stretch>
+        </p:blipFill>
+        <p:spPr>
+          <a:xfrm>
+            <a:off x="5045006" y="6356057"/>
+            <a:ext cx="6409575" cy="363174"/>
+          </a:xfrm>
+          <a:prstGeom prst="rect">
+            <a:avLst/>
+          </a:prstGeom>
+        </p:spPr>
+      </p:pic>
+      <p:sp>
+        <p:nvSpPr>
+          <p:cNvPr id="84" name="Marcador de número de diapositiva 83">
+            <a:extLst>
+              <a:ext uri="{FF2B5EF4-FFF2-40B4-BE49-F238E27FC236}">
+                <a16:creationId xmlns:a16="http://schemas.microsoft.com/office/drawing/2014/main" id="{2F388BAD-9D9D-80EC-B55F-C80E6C6B695F}"/>
               </a:ext>
             </a:extLst>
           </p:cNvPr>
@@ -8309,255 +9227,171 @@
           <a:p>
             <a:fld id="{B6F15528-21DE-4FAA-801E-634DDDAF4B2B}" type="slidenum">
               <a:rPr lang="es-ES" smtClean="0"/>
-              <a:t>7</a:t>
+              <a:t>8</a:t>
             </a:fld>
             <a:endParaRPr lang="es-ES"/>
           </a:p>
         </p:txBody>
       </p:sp>
-      <p:pic>
-        <p:nvPicPr>
-          <p:cNvPr id="4" name="Imagen 3">
-            <a:extLst>
-              <a:ext uri="{FF2B5EF4-FFF2-40B4-BE49-F238E27FC236}">
-                <a16:creationId xmlns:a16="http://schemas.microsoft.com/office/drawing/2014/main" id="{CB28C5BF-6E00-F4C8-53D4-01F47458C09B}"/>
-              </a:ext>
-            </a:extLst>
-          </p:cNvPr>
-          <p:cNvPicPr>
-            <a:picLocks noChangeAspect="1"/>
-          </p:cNvPicPr>
+      <p:sp>
+        <p:nvSpPr>
+          <p:cNvPr id="3" name="Marcador de pie de página 2">
+            <a:extLst>
+              <a:ext uri="{FF2B5EF4-FFF2-40B4-BE49-F238E27FC236}">
+                <a16:creationId xmlns:a16="http://schemas.microsoft.com/office/drawing/2014/main" id="{9D9E2A85-EB40-C5DF-B4B5-1AF964486BE4}"/>
+              </a:ext>
+            </a:extLst>
+          </p:cNvPr>
+          <p:cNvSpPr>
+            <a:spLocks noGrp="1"/>
+          </p:cNvSpPr>
+          <p:nvPr>
+            <p:ph type="ftr" sz="quarter" idx="5"/>
+          </p:nvPr>
+        </p:nvSpPr>
+        <p:spPr/>
+        <p:txBody>
+          <a:bodyPr/>
+          <a:lstStyle/>
+          <a:p>
+            <a:pPr marL="12700">
+              <a:spcBef>
+                <a:spcPts val="15"/>
+              </a:spcBef>
+            </a:pPr>
+            <a:r>
+              <a:rPr lang="es-ES" spc="-5"/>
+              <a:t>LAB 1.0. WAVEGUIDES</a:t>
+            </a:r>
+            <a:endParaRPr lang="es-ES" spc="-5" dirty="0"/>
+          </a:p>
+        </p:txBody>
+      </p:sp>
+      <p:sp>
+        <p:nvSpPr>
+          <p:cNvPr id="2" name="CuadroTexto 1">
+            <a:extLst>
+              <a:ext uri="{FF2B5EF4-FFF2-40B4-BE49-F238E27FC236}">
+                <a16:creationId xmlns:a16="http://schemas.microsoft.com/office/drawing/2014/main" id="{8CA66BFA-6CC5-54C4-8A03-19DF6784B301}"/>
+              </a:ext>
+            </a:extLst>
+          </p:cNvPr>
+          <p:cNvSpPr txBox="1"/>
           <p:nvPr/>
-        </p:nvPicPr>
-        <p:blipFill>
-          <a:blip r:embed="rId2"/>
-          <a:stretch>
-            <a:fillRect/>
-          </a:stretch>
-        </p:blipFill>
+        </p:nvSpPr>
         <p:spPr>
           <a:xfrm>
-            <a:off x="-817154" y="39914"/>
-            <a:ext cx="6515100" cy="3581400"/>
+            <a:off x="480239" y="1066800"/>
+            <a:ext cx="11199971" cy="4247317"/>
           </a:xfrm>
           <a:prstGeom prst="rect">
             <a:avLst/>
           </a:prstGeom>
+          <a:solidFill>
+            <a:schemeClr val="bg1">
+              <a:lumMod val="95000"/>
+            </a:schemeClr>
+          </a:solidFill>
+          <a:ln w="28575">
+            <a:solidFill>
+              <a:srgbClr val="E0700D"/>
+            </a:solidFill>
+          </a:ln>
         </p:spPr>
-      </p:pic>
-      <p:pic>
-        <p:nvPicPr>
-          <p:cNvPr id="6" name="Imagen 5">
-            <a:extLst>
-              <a:ext uri="{FF2B5EF4-FFF2-40B4-BE49-F238E27FC236}">
-                <a16:creationId xmlns:a16="http://schemas.microsoft.com/office/drawing/2014/main" id="{55823A1E-CA6E-2EDE-DB35-5535A6C195C5}"/>
-              </a:ext>
-            </a:extLst>
-          </p:cNvPr>
-          <p:cNvPicPr>
-            <a:picLocks noChangeAspect="1"/>
-          </p:cNvPicPr>
-          <p:nvPr/>
-        </p:nvPicPr>
-        <p:blipFill>
-          <a:blip r:embed="rId3"/>
-          <a:stretch>
-            <a:fillRect/>
-          </a:stretch>
-        </p:blipFill>
-        <p:spPr>
-          <a:xfrm>
-            <a:off x="5661660" y="25400"/>
-            <a:ext cx="6515100" cy="3581400"/>
-          </a:xfrm>
-          <a:prstGeom prst="rect">
-            <a:avLst/>
-          </a:prstGeom>
-        </p:spPr>
-      </p:pic>
-      <p:pic>
-        <p:nvPicPr>
-          <p:cNvPr id="8" name="Imagen 7">
-            <a:extLst>
-              <a:ext uri="{FF2B5EF4-FFF2-40B4-BE49-F238E27FC236}">
-                <a16:creationId xmlns:a16="http://schemas.microsoft.com/office/drawing/2014/main" id="{89BDA460-8559-59C5-9C2C-CBCADC71AF69}"/>
-              </a:ext>
-            </a:extLst>
-          </p:cNvPr>
-          <p:cNvPicPr>
-            <a:picLocks noChangeAspect="1"/>
-          </p:cNvPicPr>
-          <p:nvPr/>
-        </p:nvPicPr>
-        <p:blipFill>
-          <a:blip r:embed="rId4"/>
-          <a:stretch>
-            <a:fillRect/>
-          </a:stretch>
-        </p:blipFill>
-        <p:spPr>
-          <a:xfrm>
-            <a:off x="-381000" y="2163127"/>
-            <a:ext cx="7534685" cy="4386263"/>
-          </a:xfrm>
-          <a:prstGeom prst="rect">
-            <a:avLst/>
-          </a:prstGeom>
-        </p:spPr>
-      </p:pic>
-      <p:pic>
-        <p:nvPicPr>
-          <p:cNvPr id="12" name="Imagen 11">
-            <a:extLst>
-              <a:ext uri="{FF2B5EF4-FFF2-40B4-BE49-F238E27FC236}">
-                <a16:creationId xmlns:a16="http://schemas.microsoft.com/office/drawing/2014/main" id="{D3F18E53-796A-F2C5-AEC0-E10058D449E2}"/>
-              </a:ext>
-            </a:extLst>
-          </p:cNvPr>
-          <p:cNvPicPr>
-            <a:picLocks noChangeAspect="1"/>
-          </p:cNvPicPr>
-          <p:nvPr/>
-        </p:nvPicPr>
-        <p:blipFill>
-          <a:blip r:embed="rId5"/>
-          <a:stretch>
-            <a:fillRect/>
-          </a:stretch>
-        </p:blipFill>
-        <p:spPr>
-          <a:xfrm>
-            <a:off x="6442710" y="2044065"/>
-            <a:ext cx="5734050" cy="4333875"/>
-          </a:xfrm>
-          <a:prstGeom prst="rect">
-            <a:avLst/>
-          </a:prstGeom>
-        </p:spPr>
-      </p:pic>
+        <p:txBody>
+          <a:bodyPr wrap="square" rtlCol="0">
+            <a:spAutoFit/>
+          </a:bodyPr>
+          <a:lstStyle/>
+          <a:p>
+            <a:pPr algn="just"/>
+            <a:r>
+              <a:rPr lang="en-US" dirty="0">
+                <a:latin typeface="Arial" panose="020B0604020202020204" pitchFamily="34" charset="0"/>
+                <a:cs typeface="Arial" panose="020B0604020202020204" pitchFamily="34" charset="0"/>
+              </a:rPr>
+              <a:t>The three plots show how bend radius influences modal confinement. At small radii, the mode is pushed outward, and its shape becomes noticeably distorted; this increases leakage into the cladding and reduces confinement. This </a:t>
+            </a:r>
+            <a:r>
+              <a:rPr lang="en-US" dirty="0" err="1">
+                <a:latin typeface="Arial" panose="020B0604020202020204" pitchFamily="34" charset="0"/>
+                <a:cs typeface="Arial" panose="020B0604020202020204" pitchFamily="34" charset="0"/>
+              </a:rPr>
+              <a:t>behaviour</a:t>
+            </a:r>
+            <a:r>
+              <a:rPr lang="en-US" dirty="0">
+                <a:latin typeface="Arial" panose="020B0604020202020204" pitchFamily="34" charset="0"/>
+                <a:cs typeface="Arial" panose="020B0604020202020204" pitchFamily="34" charset="0"/>
+              </a:rPr>
+              <a:t> can be observed in the plots for small radii in both TE and TM, where the effective index drops significantly. However, it is easy to notice that the TM mode has a more significant drop in the effective index value. </a:t>
+            </a:r>
+          </a:p>
+          <a:p>
+            <a:pPr algn="just"/>
+            <a:endParaRPr lang="en-US" dirty="0">
+              <a:latin typeface="Arial" panose="020B0604020202020204" pitchFamily="34" charset="0"/>
+              <a:cs typeface="Arial" panose="020B0604020202020204" pitchFamily="34" charset="0"/>
+            </a:endParaRPr>
+          </a:p>
+          <a:p>
+            <a:pPr algn="just"/>
+            <a:r>
+              <a:rPr lang="en-US" dirty="0">
+                <a:latin typeface="Arial" panose="020B0604020202020204" pitchFamily="34" charset="0"/>
+                <a:cs typeface="Arial" panose="020B0604020202020204" pitchFamily="34" charset="0"/>
+              </a:rPr>
+              <a:t>As the radius increases, the mode regains a stable profile. Above 50 µm, both modes settle into nearly constant effective index values, although the TE₀ mode remains much more stable across the entire range. </a:t>
+            </a:r>
+          </a:p>
+          <a:p>
+            <a:pPr algn="just"/>
+            <a:endParaRPr lang="en-US" dirty="0">
+              <a:latin typeface="Arial" panose="020B0604020202020204" pitchFamily="34" charset="0"/>
+              <a:cs typeface="Arial" panose="020B0604020202020204" pitchFamily="34" charset="0"/>
+            </a:endParaRPr>
+          </a:p>
+          <a:p>
+            <a:pPr algn="just"/>
+            <a:r>
+              <a:rPr lang="en-US" dirty="0">
+                <a:latin typeface="Arial" panose="020B0604020202020204" pitchFamily="34" charset="0"/>
+                <a:cs typeface="Arial" panose="020B0604020202020204" pitchFamily="34" charset="0"/>
+              </a:rPr>
+              <a:t>The loss curve follows the same physical tendency: tight bends correspond to high mismatch losses, which decrease rapidly as the waveguide curvature relaxes. The minimum of the loss curve appears at 75 µm.  Since this radius also coincides with the region where the effective indices stop changing, we can state that the safe radius is: 75 µm. </a:t>
+            </a:r>
+            <a:endParaRPr lang="en-US" u="sng" dirty="0">
+              <a:latin typeface="Arial" panose="020B0604020202020204" pitchFamily="34" charset="0"/>
+              <a:cs typeface="Arial" panose="020B0604020202020204" pitchFamily="34" charset="0"/>
+            </a:endParaRPr>
+          </a:p>
+          <a:p>
+            <a:pPr algn="just"/>
+            <a:endParaRPr lang="en-US" sz="1200" dirty="0">
+              <a:latin typeface="Arial" panose="020B0604020202020204" pitchFamily="34" charset="0"/>
+              <a:cs typeface="Arial" panose="020B0604020202020204" pitchFamily="34" charset="0"/>
+            </a:endParaRPr>
+          </a:p>
+          <a:p>
+            <a:pPr algn="just"/>
+            <a:endParaRPr lang="en-US" sz="1200" dirty="0">
+              <a:latin typeface="Arial" panose="020B0604020202020204" pitchFamily="34" charset="0"/>
+              <a:cs typeface="Arial" panose="020B0604020202020204" pitchFamily="34" charset="0"/>
+            </a:endParaRPr>
+          </a:p>
+          <a:p>
+            <a:pPr algn="just"/>
+            <a:endParaRPr lang="en-US" sz="1200" dirty="0">
+              <a:latin typeface="Arial" panose="020B0604020202020204" pitchFamily="34" charset="0"/>
+              <a:cs typeface="Arial" panose="020B0604020202020204" pitchFamily="34" charset="0"/>
+            </a:endParaRPr>
+          </a:p>
+        </p:txBody>
+      </p:sp>
     </p:spTree>
     <p:extLst>
       <p:ext uri="{BB962C8B-B14F-4D97-AF65-F5344CB8AC3E}">
-        <p14:creationId xmlns:p14="http://schemas.microsoft.com/office/powerpoint/2010/main" val="287318575"/>
-      </p:ext>
-    </p:extLst>
-  </p:cSld>
-  <p:clrMapOvr>
-    <a:masterClrMapping/>
-  </p:clrMapOvr>
-</p:sld>
-</file>
-
-<file path=ppt/slides/slide8.xml><?xml version="1.0" encoding="utf-8"?>
-<p:sld xmlns:a="http://schemas.openxmlformats.org/drawingml/2006/main" xmlns:r="http://schemas.openxmlformats.org/officeDocument/2006/relationships" xmlns:p="http://schemas.openxmlformats.org/presentationml/2006/main">
-  <p:cSld>
-    <p:spTree>
-      <p:nvGrpSpPr>
-        <p:cNvPr id="1" name=""/>
-        <p:cNvGrpSpPr/>
-        <p:nvPr/>
-      </p:nvGrpSpPr>
-      <p:grpSpPr>
-        <a:xfrm>
-          <a:off x="0" y="0"/>
-          <a:ext cx="0" cy="0"/>
-          <a:chOff x="0" y="0"/>
-          <a:chExt cx="0" cy="0"/>
-        </a:xfrm>
-      </p:grpSpPr>
-      <p:sp>
-        <p:nvSpPr>
-          <p:cNvPr id="2" name="Marcador de número de diapositiva 1">
-            <a:extLst>
-              <a:ext uri="{FF2B5EF4-FFF2-40B4-BE49-F238E27FC236}">
-                <a16:creationId xmlns:a16="http://schemas.microsoft.com/office/drawing/2014/main" id="{F0BF7D35-2378-E60F-BB44-9F4A8B7CD7C8}"/>
-              </a:ext>
-            </a:extLst>
-          </p:cNvPr>
-          <p:cNvSpPr>
-            <a:spLocks noGrp="1"/>
-          </p:cNvSpPr>
-          <p:nvPr>
-            <p:ph type="sldNum" sz="quarter" idx="7"/>
-          </p:nvPr>
-        </p:nvSpPr>
-        <p:spPr/>
-        <p:txBody>
-          <a:bodyPr/>
-          <a:lstStyle/>
-          <a:p>
-            <a:fld id="{B6F15528-21DE-4FAA-801E-634DDDAF4B2B}" type="slidenum">
-              <a:rPr lang="es-ES" smtClean="0"/>
-              <a:t>8</a:t>
-            </a:fld>
-            <a:endParaRPr lang="es-ES"/>
-          </a:p>
-        </p:txBody>
-      </p:sp>
-      <p:pic>
-        <p:nvPicPr>
-          <p:cNvPr id="8" name="Imagen 7">
-            <a:extLst>
-              <a:ext uri="{FF2B5EF4-FFF2-40B4-BE49-F238E27FC236}">
-                <a16:creationId xmlns:a16="http://schemas.microsoft.com/office/drawing/2014/main" id="{20526EA3-AFC5-9D1D-E391-B7DA9A9D7697}"/>
-              </a:ext>
-            </a:extLst>
-          </p:cNvPr>
-          <p:cNvPicPr>
-            <a:picLocks noChangeAspect="1"/>
-          </p:cNvPicPr>
-          <p:nvPr/>
-        </p:nvPicPr>
-        <p:blipFill>
-          <a:blip r:embed="rId2"/>
-          <a:stretch>
-            <a:fillRect/>
-          </a:stretch>
-        </p:blipFill>
-        <p:spPr>
-          <a:xfrm>
-            <a:off x="6672262" y="295275"/>
-            <a:ext cx="5400675" cy="4333875"/>
-          </a:xfrm>
-          <a:prstGeom prst="rect">
-            <a:avLst/>
-          </a:prstGeom>
-        </p:spPr>
-      </p:pic>
-      <p:pic>
-        <p:nvPicPr>
-          <p:cNvPr id="10" name="Imagen 9">
-            <a:extLst>
-              <a:ext uri="{FF2B5EF4-FFF2-40B4-BE49-F238E27FC236}">
-                <a16:creationId xmlns:a16="http://schemas.microsoft.com/office/drawing/2014/main" id="{2CAC14DE-7679-F7EC-757C-C6F457DFA198}"/>
-              </a:ext>
-            </a:extLst>
-          </p:cNvPr>
-          <p:cNvPicPr>
-            <a:picLocks noChangeAspect="1"/>
-          </p:cNvPicPr>
-          <p:nvPr/>
-        </p:nvPicPr>
-        <p:blipFill>
-          <a:blip r:embed="rId3"/>
-          <a:stretch>
-            <a:fillRect/>
-          </a:stretch>
-        </p:blipFill>
-        <p:spPr>
-          <a:xfrm>
-            <a:off x="1066800" y="990600"/>
-            <a:ext cx="5179736" cy="3438525"/>
-          </a:xfrm>
-          <a:prstGeom prst="rect">
-            <a:avLst/>
-          </a:prstGeom>
-        </p:spPr>
-      </p:pic>
-    </p:spTree>
-    <p:extLst>
-      <p:ext uri="{BB962C8B-B14F-4D97-AF65-F5344CB8AC3E}">
-        <p14:creationId xmlns:p14="http://schemas.microsoft.com/office/powerpoint/2010/main" val="1141115365"/>
+        <p14:creationId xmlns:p14="http://schemas.microsoft.com/office/powerpoint/2010/main" val="3245107681"/>
       </p:ext>
     </p:extLst>
   </p:cSld>
@@ -8586,109 +9420,10 @@
       </p:grpSpPr>
       <p:sp>
         <p:nvSpPr>
-          <p:cNvPr id="3" name="object 3"/>
-          <p:cNvSpPr/>
-          <p:nvPr/>
-        </p:nvSpPr>
-        <p:spPr>
-          <a:xfrm>
-            <a:off x="3945635" y="2636520"/>
-            <a:ext cx="8246363" cy="1584959"/>
-          </a:xfrm>
-          <a:prstGeom prst="rect">
-            <a:avLst/>
-          </a:prstGeom>
-          <a:blipFill>
-            <a:blip r:embed="rId2" cstate="print"/>
-            <a:stretch>
-              <a:fillRect/>
-            </a:stretch>
-          </a:blipFill>
-        </p:spPr>
-        <p:txBody>
-          <a:bodyPr wrap="square" lIns="0" tIns="0" rIns="0" bIns="0" rtlCol="0"/>
-          <a:lstStyle/>
-          <a:p>
-            <a:endParaRPr/>
-          </a:p>
-        </p:txBody>
-      </p:sp>
-      <p:sp>
-        <p:nvSpPr>
-          <p:cNvPr id="4" name="object 4"/>
-          <p:cNvSpPr txBox="1">
-            <a:spLocks noGrp="1"/>
-          </p:cNvSpPr>
-          <p:nvPr>
-            <p:ph type="title"/>
-          </p:nvPr>
-        </p:nvSpPr>
-        <p:spPr>
-          <a:xfrm>
-            <a:off x="4513326" y="3165729"/>
-            <a:ext cx="2233295" cy="513715"/>
-          </a:xfrm>
-          <a:prstGeom prst="rect">
-            <a:avLst/>
-          </a:prstGeom>
-        </p:spPr>
-        <p:txBody>
-          <a:bodyPr vert="horz" wrap="square" lIns="0" tIns="13335" rIns="0" bIns="0" rtlCol="0">
-            <a:spAutoFit/>
-          </a:bodyPr>
-          <a:lstStyle/>
-          <a:p>
-            <a:pPr marL="12700">
-              <a:lnSpc>
-                <a:spcPct val="100000"/>
-              </a:lnSpc>
-              <a:spcBef>
-                <a:spcPts val="105"/>
-              </a:spcBef>
-            </a:pPr>
-            <a:r>
-              <a:rPr sz="3200" b="1" spc="-5" dirty="0">
-                <a:solidFill>
-                  <a:srgbClr val="FFFFFF"/>
-                </a:solidFill>
-                <a:latin typeface="Lucida Sans"/>
-                <a:cs typeface="Lucida Sans"/>
-              </a:rPr>
-              <a:t>Thank</a:t>
-            </a:r>
-            <a:r>
-              <a:rPr sz="3200" b="1" spc="-55" dirty="0">
-                <a:solidFill>
-                  <a:srgbClr val="FFFFFF"/>
-                </a:solidFill>
-                <a:latin typeface="Lucida Sans"/>
-                <a:cs typeface="Lucida Sans"/>
-              </a:rPr>
-              <a:t> </a:t>
-            </a:r>
-            <a:r>
-              <a:rPr sz="3200" b="1" dirty="0">
-                <a:solidFill>
-                  <a:srgbClr val="FFFFFF"/>
-                </a:solidFill>
-                <a:latin typeface="Lucida Sans"/>
-                <a:cs typeface="Lucida Sans"/>
-              </a:rPr>
-              <a:t>you</a:t>
-            </a:r>
-            <a:endParaRPr sz="3200">
-              <a:latin typeface="Lucida Sans"/>
-              <a:cs typeface="Lucida Sans"/>
-            </a:endParaRPr>
-          </a:p>
-        </p:txBody>
-      </p:sp>
-      <p:sp>
-        <p:nvSpPr>
-          <p:cNvPr id="5" name="Marcador de número de diapositiva 4">
-            <a:extLst>
-              <a:ext uri="{FF2B5EF4-FFF2-40B4-BE49-F238E27FC236}">
-                <a16:creationId xmlns:a16="http://schemas.microsoft.com/office/drawing/2014/main" id="{B052DA19-AD24-7D24-2AE9-51F8F5A7F5E0}"/>
+          <p:cNvPr id="2" name="Marcador de número de diapositiva 1">
+            <a:extLst>
+              <a:ext uri="{FF2B5EF4-FFF2-40B4-BE49-F238E27FC236}">
+                <a16:creationId xmlns:a16="http://schemas.microsoft.com/office/drawing/2014/main" id="{4054DCB2-B09D-1955-523E-B4BCBF085EC6}"/>
               </a:ext>
             </a:extLst>
           </p:cNvPr>
@@ -8712,7 +9447,233 @@
           </a:p>
         </p:txBody>
       </p:sp>
+      <p:sp>
+        <p:nvSpPr>
+          <p:cNvPr id="4" name="CuadroTexto 3">
+            <a:extLst>
+              <a:ext uri="{FF2B5EF4-FFF2-40B4-BE49-F238E27FC236}">
+                <a16:creationId xmlns:a16="http://schemas.microsoft.com/office/drawing/2014/main" id="{994759C6-0934-EE4E-0BD2-944D974BD3BF}"/>
+              </a:ext>
+            </a:extLst>
+          </p:cNvPr>
+          <p:cNvSpPr txBox="1"/>
+          <p:nvPr/>
+        </p:nvSpPr>
+        <p:spPr>
+          <a:xfrm>
+            <a:off x="457200" y="304800"/>
+            <a:ext cx="7620000" cy="461665"/>
+          </a:xfrm>
+          <a:prstGeom prst="rect">
+            <a:avLst/>
+          </a:prstGeom>
+          <a:noFill/>
+        </p:spPr>
+        <p:txBody>
+          <a:bodyPr wrap="square">
+            <a:spAutoFit/>
+          </a:bodyPr>
+          <a:lstStyle/>
+          <a:p>
+            <a:r>
+              <a:rPr lang="en-US" sz="2400" b="1" dirty="0"/>
+              <a:t>EXTRA (SOI) : Learning outcome #1 – Convergence tests</a:t>
+            </a:r>
+            <a:endParaRPr lang="es-ES" sz="2400" b="1" dirty="0"/>
+          </a:p>
+        </p:txBody>
+      </p:sp>
+      <p:pic>
+        <p:nvPicPr>
+          <p:cNvPr id="5" name="Imagen 4">
+            <a:extLst>
+              <a:ext uri="{FF2B5EF4-FFF2-40B4-BE49-F238E27FC236}">
+                <a16:creationId xmlns:a16="http://schemas.microsoft.com/office/drawing/2014/main" id="{FEAB9D9C-BE91-481F-45BA-097C41FA725B}"/>
+              </a:ext>
+            </a:extLst>
+          </p:cNvPr>
+          <p:cNvPicPr>
+            <a:picLocks noChangeAspect="1"/>
+          </p:cNvPicPr>
+          <p:nvPr/>
+        </p:nvPicPr>
+        <p:blipFill>
+          <a:blip r:embed="rId2"/>
+          <a:stretch>
+            <a:fillRect/>
+          </a:stretch>
+        </p:blipFill>
+        <p:spPr>
+          <a:xfrm>
+            <a:off x="457200" y="986888"/>
+            <a:ext cx="5601325" cy="3079090"/>
+          </a:xfrm>
+          <a:prstGeom prst="rect">
+            <a:avLst/>
+          </a:prstGeom>
+        </p:spPr>
+      </p:pic>
+      <p:pic>
+        <p:nvPicPr>
+          <p:cNvPr id="6" name="Imagen 5">
+            <a:extLst>
+              <a:ext uri="{FF2B5EF4-FFF2-40B4-BE49-F238E27FC236}">
+                <a16:creationId xmlns:a16="http://schemas.microsoft.com/office/drawing/2014/main" id="{F8360CB9-6439-A1FA-1035-FF51652D52FA}"/>
+              </a:ext>
+            </a:extLst>
+          </p:cNvPr>
+          <p:cNvPicPr>
+            <a:picLocks noChangeAspect="1"/>
+          </p:cNvPicPr>
+          <p:nvPr/>
+        </p:nvPicPr>
+        <p:blipFill>
+          <a:blip r:embed="rId3"/>
+          <a:stretch>
+            <a:fillRect/>
+          </a:stretch>
+        </p:blipFill>
+        <p:spPr>
+          <a:xfrm>
+            <a:off x="6096000" y="965199"/>
+            <a:ext cx="5601325" cy="3079091"/>
+          </a:xfrm>
+          <a:prstGeom prst="rect">
+            <a:avLst/>
+          </a:prstGeom>
+        </p:spPr>
+      </p:pic>
+      <p:sp>
+        <p:nvSpPr>
+          <p:cNvPr id="8" name="CuadroTexto 7">
+            <a:extLst>
+              <a:ext uri="{FF2B5EF4-FFF2-40B4-BE49-F238E27FC236}">
+                <a16:creationId xmlns:a16="http://schemas.microsoft.com/office/drawing/2014/main" id="{AA0091E7-EC30-C6A2-3411-0ED0268A78FF}"/>
+              </a:ext>
+            </a:extLst>
+          </p:cNvPr>
+          <p:cNvSpPr txBox="1"/>
+          <p:nvPr/>
+        </p:nvSpPr>
+        <p:spPr>
+          <a:xfrm>
+            <a:off x="609600" y="4484826"/>
+            <a:ext cx="11199971" cy="1692771"/>
+          </a:xfrm>
+          <a:prstGeom prst="rect">
+            <a:avLst/>
+          </a:prstGeom>
+          <a:solidFill>
+            <a:schemeClr val="bg1">
+              <a:lumMod val="95000"/>
+            </a:schemeClr>
+          </a:solidFill>
+          <a:ln w="28575">
+            <a:solidFill>
+              <a:srgbClr val="E0700D"/>
+            </a:solidFill>
+          </a:ln>
+        </p:spPr>
+        <p:txBody>
+          <a:bodyPr wrap="square" rtlCol="0">
+            <a:spAutoFit/>
+          </a:bodyPr>
+          <a:lstStyle/>
+          <a:p>
+            <a:pPr algn="just"/>
+            <a:r>
+              <a:rPr lang="en-US" dirty="0">
+                <a:latin typeface="Arial" panose="020B0604020202020204" pitchFamily="34" charset="0"/>
+                <a:cs typeface="Arial" panose="020B0604020202020204" pitchFamily="34" charset="0"/>
+              </a:rPr>
+              <a:t>For the SOI case, the effective index lies around 2.45–2.49 but the grid‑resolution sweep shows pronounced oscillations with no convergence; unlike </a:t>
+            </a:r>
+            <a:r>
+              <a:rPr lang="en-US" dirty="0" err="1">
+                <a:latin typeface="Arial" panose="020B0604020202020204" pitchFamily="34" charset="0"/>
+                <a:cs typeface="Arial" panose="020B0604020202020204" pitchFamily="34" charset="0"/>
+              </a:rPr>
+              <a:t>SiN</a:t>
+            </a:r>
+            <a:r>
+              <a:rPr lang="en-US" dirty="0">
+                <a:latin typeface="Arial" panose="020B0604020202020204" pitchFamily="34" charset="0"/>
+                <a:cs typeface="Arial" panose="020B0604020202020204" pitchFamily="34" charset="0"/>
+              </a:rPr>
+              <a:t>, where </a:t>
+            </a:r>
+            <a:r>
+              <a:rPr lang="en-US" dirty="0" err="1">
+                <a:latin typeface="Arial" panose="020B0604020202020204" pitchFamily="34" charset="0"/>
+                <a:cs typeface="Arial" panose="020B0604020202020204" pitchFamily="34" charset="0"/>
+              </a:rPr>
+              <a:t>n_eff</a:t>
+            </a:r>
+            <a:r>
+              <a:rPr lang="en-US" dirty="0">
+                <a:latin typeface="Arial" panose="020B0604020202020204" pitchFamily="34" charset="0"/>
+                <a:cs typeface="Arial" panose="020B0604020202020204" pitchFamily="34" charset="0"/>
+              </a:rPr>
+              <a:t> = 1.605 stabilized from grid resolution  = 50 (and 20 was an acceptable compromise). For SOI no tested grid value can be selected so a finer or adaptive mesh is required before trusting the result. The max‑grid‑scaling stabilizes around 1.3 around </a:t>
+            </a:r>
+            <a:r>
+              <a:rPr lang="en-US" dirty="0" err="1">
+                <a:latin typeface="Arial" panose="020B0604020202020204" pitchFamily="34" charset="0"/>
+                <a:cs typeface="Arial" panose="020B0604020202020204" pitchFamily="34" charset="0"/>
+              </a:rPr>
+              <a:t>n_eff</a:t>
+            </a:r>
+            <a:r>
+              <a:rPr lang="en-US" dirty="0">
+                <a:latin typeface="Arial" panose="020B0604020202020204" pitchFamily="34" charset="0"/>
+                <a:cs typeface="Arial" panose="020B0604020202020204" pitchFamily="34" charset="0"/>
+              </a:rPr>
+              <a:t> = 2.45. Compared with </a:t>
+            </a:r>
+            <a:r>
+              <a:rPr lang="en-US" dirty="0" err="1">
+                <a:latin typeface="Arial" panose="020B0604020202020204" pitchFamily="34" charset="0"/>
+                <a:cs typeface="Arial" panose="020B0604020202020204" pitchFamily="34" charset="0"/>
+              </a:rPr>
+              <a:t>SiN</a:t>
+            </a:r>
+            <a:r>
+              <a:rPr lang="en-US" dirty="0">
+                <a:latin typeface="Arial" panose="020B0604020202020204" pitchFamily="34" charset="0"/>
+                <a:cs typeface="Arial" panose="020B0604020202020204" pitchFamily="34" charset="0"/>
+              </a:rPr>
+              <a:t>, SOI yields a higher absolute </a:t>
+            </a:r>
+            <a:r>
+              <a:rPr lang="en-US" dirty="0" err="1">
+                <a:latin typeface="Arial" panose="020B0604020202020204" pitchFamily="34" charset="0"/>
+                <a:cs typeface="Arial" panose="020B0604020202020204" pitchFamily="34" charset="0"/>
+              </a:rPr>
+              <a:t>n_eff</a:t>
+            </a:r>
+            <a:r>
+              <a:rPr lang="en-US" dirty="0">
+                <a:latin typeface="Arial" panose="020B0604020202020204" pitchFamily="34" charset="0"/>
+                <a:cs typeface="Arial" panose="020B0604020202020204" pitchFamily="34" charset="0"/>
+              </a:rPr>
+              <a:t> and a much stronger sensitivity to grid resolution. </a:t>
+            </a:r>
+          </a:p>
+          <a:p>
+            <a:pPr algn="just"/>
+            <a:endParaRPr lang="en-US" sz="1400" dirty="0">
+              <a:latin typeface="Arial" panose="020B0604020202020204" pitchFamily="34" charset="0"/>
+              <a:cs typeface="Arial" panose="020B0604020202020204" pitchFamily="34" charset="0"/>
+            </a:endParaRPr>
+          </a:p>
+        </p:txBody>
+      </p:sp>
     </p:spTree>
+    <p:extLst>
+      <p:ext uri="{BB962C8B-B14F-4D97-AF65-F5344CB8AC3E}">
+        <p14:creationId xmlns:p14="http://schemas.microsoft.com/office/powerpoint/2010/main" val="3057179106"/>
+      </p:ext>
+    </p:extLst>
   </p:cSld>
   <p:clrMapOvr>
     <a:masterClrMapping/>
